--- a/docs/capstone/deck/zava-forward-executive-draft.pptx
+++ b/docs/capstone/deck/zava-forward-executive-draft.pptx
@@ -17,6 +17,7 @@
     <p:sldId id="265" r:id="rId17"/>
     <p:sldId id="266" r:id="rId18"/>
     <p:sldId id="267" r:id="rId19"/>
+    <p:sldId id="277" r:id="rId29"/>
     <p:sldId id="268" r:id="rId20"/>
     <p:sldId id="269" r:id="rId21"/>
     <p:sldId id="270" r:id="rId22"/>
@@ -2047,6 +2048,152 @@
           <a:bodyPr/>
           <a:p/>
         </p:txBody>
+      </p:sp>
+    </p:spTree>
+  </p:cSld>
+  <p:clrMapOvr>
+    <a:masterClrMapping/>
+  </p:clrMapOvr>
+</p:notes>
+</file>
+
+<file path=ppt/notesSlides/notesSlide22.xml><?xml version="1.0" encoding="utf-8"?>
+<p:notes xmlns:a="http://schemas.openxmlformats.org/drawingml/2006/main" xmlns:p="http://schemas.openxmlformats.org/presentationml/2006/main" xmlns:r="http://schemas.openxmlformats.org/officeDocument/2006/relationships">
+  <p:cSld>
+    <p:spTree>
+      <p:nvGrpSpPr>
+        <p:cNvPr id="1" name=""/>
+        <p:cNvGrpSpPr/>
+        <p:nvPr/>
+      </p:nvGrpSpPr>
+      <p:grpSpPr>
+        <a:xfrm>
+          <a:off x="0" y="0"/>
+          <a:ext cx="0" cy="0"/>
+          <a:chOff x="0" y="0"/>
+          <a:chExt cx="0" cy="0"/>
+        </a:xfrm>
+      </p:grpSpPr>
+      <p:sp>
+        <p:nvSpPr>
+          <p:cNvPr id="2" name="Slide Image Placeholder 1"/>
+          <p:cNvSpPr>
+            <a:spLocks noGrp="1"/>
+          </p:cNvSpPr>
+          <p:nvPr>
+            <p:ph type="sldImg" idx="2"/>
+          </p:nvPr>
+        </p:nvSpPr>
+        <p:spPr/>
+      </p:sp>
+      <p:sp>
+        <p:nvSpPr>
+          <p:cNvPr id="3" name="Notes Placeholder 2"/>
+          <p:cNvSpPr>
+            <a:spLocks noGrp="1"/>
+          </p:cNvSpPr>
+          <p:nvPr>
+            <p:ph type="body" idx="3" sz="quarter"/>
+          </p:nvPr>
+        </p:nvSpPr>
+        <p:spPr/>
+        <p:txBody>
+          <a:bodyPr/>
+          <a:lstStyle/>
+          <a:p>
+            <a:r>
+              <a:t>Suggested talk track, about 45 to 60 seconds (not a timed rehearsal): Five bounded assists sit on one controlled journey. Each works when someone asks. Where permitted, each can also raise a review item on its own. The workflow decides what happens next; people decide everything that matters.</a:t>
+            </a:r>
+          </a:p>
+          <a:p/>
+          <a:p>
+            <a:r>
+              <a:t>Text equivalent of the diagram (proposed design, not deployed):</a:t>
+            </a:r>
+          </a:p>
+          <a:p>
+            <a:r>
+              <a:t>1. Choose homes, Stock Prioritisation. On request: explain sourced candidate evidence. Proactive review: new conflicts or missing stock facts. Data owners verify; Assets approves policy. AI does not rank or change queues. Measure reconciliation effort, critical conflicts and viability.</a:t>
+            </a:r>
+          </a:p>
+          <a:p>
+            <a:r>
+              <a:t>2. Assess and design, Assessment Preparation. On request: prepare a sourced survey or design pack. Proactive review: changed or stale evidence goes to a named reviewer. Assessor and coordinator sign off independently. No invented site facts. Measure returns, rework and assessment-to-ready time.</a:t>
+            </a:r>
+          </a:p>
+          <a:p>
+            <a:r>
+              <a:t>3. Prepare funding, Grant and Funding Evidence. On request: draft a source-linked application or pack. Proactive review: changed terms or missing evidence go to Finance. Rules calculate eligibility and totals; Finance validates, approves and submits. The work spans planning through later claim and cash; an award is not receipt. Measure pack rework, first-time acceptance and time-to-claim.</a:t>
+            </a:r>
+          </a:p>
+          <a:p>
+            <a:r>
+              <a:t>4. Coordinate works, Works and Resident Coordination. On request: draft updates and suggest committed-capacity slots. Proactive review: unaccepted handoffs and missed updates create an owned review. The resident chooses measures; Programme and contract authority releases and instructs. No automatic messages, inferred consent or autonomous scheduling. Measure coordination effort, failed visits and unowned handoffs.</a:t>
+            </a:r>
+          </a:p>
+          <a:p>
+            <a:r>
+              <a:t>5. Verify and handover, Quality Evidence Review. On request: assemble evidence for human review. Proactive review: raise missing or conflicting evidence for independent QA. Flags never clear holds, accept work or close defects. Measure evidence rework and missed critical defects.</a:t>
+            </a:r>
+          </a:p>
+          <a:p/>
+          <a:p>
+            <a:r>
+              <a:t>Workflow core: owns identity and field rights, versions, deterministic gates, human approvals, audit, retries and manual recovery. It is not a sixth supervisor agent. Any hazard goes directly to the human safety service; model output cannot suppress intake or change its separate clocks.</a:t>
+            </a:r>
+          </a:p>
+          <a:p/>
+          <a:p>
+            <a:r>
+              <a:t>What proactive means here: a PROPOSED permitted event or scheduled task, started only after deterministic eligibility checks. It is not evidence that every watcher is deployed. Only registered, source-permitted tasks run, and they produce proposals or raise-only flags to owned human queues. A source or version change makes dependent review stale. The rule-only or manual path stays available if the model fails or the task is inappropriate.</a:t>
+            </a:r>
+          </a:p>
+          <a:p/>
+          <a:p>
+            <a:r>
+              <a:t>How the process should improve (hypotheses): fewer evidence gaps, less rework, clearer handoffs. Test by comparing rules or manual work with assisted work on paired cases. Count preparation, review and correction effort, critical errors, latency, cost and uncertainty. Current live inference is narrow feasibility, not proof of every capability, calibrated quality or value.</a:t>
+            </a:r>
+          </a:p>
+          <a:p/>
+          <a:p>
+            <a:r>
+              <a:t>Evidence (repository-local):</a:t>
+            </a:r>
+          </a:p>
+          <a:p>
+            <a:r>
+              <a:t>docs/case_study_48_addendum.md: Digital Foundation; Where Agents Fit; Agentic Architecture Brief; Decision 1 in Application Design.</a:t>
+            </a:r>
+          </a:p>
+          <a:p>
+            <a:r>
+              <a:t>docs/prds/zava-forward-retrofit-programme-demonstrator.md: AI Model Selection and Evaluation Harness; Bounded-Agent Orchestration Pattern.</a:t>
+            </a:r>
+          </a:p>
+          <a:p>
+            <a:r>
+              <a:t>docs/reference/research/company/agent-request-challenge.md: Summary and each capability's value test.</a:t>
+            </a:r>
+          </a:p>
+          <a:p>
+            <a:r>
+              <a:t>docs/reference/research/gap-analysis-next-build.md: Draft Experiment Closure; #58 features and source are not automatically in the current deployment.</a:t>
+            </a:r>
+          </a:p>
+          <a:p/>
+        </p:txBody>
+      </p:sp>
+      <p:sp>
+        <p:nvSpPr>
+          <p:cNvPr id="4" name="Slide Number Placeholder 3"/>
+          <p:cNvSpPr>
+            <a:spLocks noGrp="1"/>
+          </p:cNvSpPr>
+          <p:nvPr>
+            <p:ph type="sldNum" idx="5" sz="quarter"/>
+          </p:nvPr>
+        </p:nvSpPr>
+        <p:spPr/>
       </p:sp>
     </p:spTree>
   </p:cSld>
@@ -8247,16 +8394,40 @@
         <p:nvPr/>
       </p:nvGrpSpPr>
       <p:grpSpPr/>
-      <p:sp>
-        <p:nvSpPr>
-          <p:cNvPr id="2" name="TextBox 1"/>
+      <p:pic>
+        <p:nvPicPr>
+          <p:cNvPr id="2" name="Agents in the retrofit process diagram" descr="Proposed design diagram titled Five assists. One controlled journey. Five phases run left to right: Choose homes, Assess and design, Prepare funding, Coordinate works, Verify and handover. Each phase has one bounded assist that works on request and proactively raises a review item to a named human queue. A workflow core underneath owns rights, versions, gates, approvals, audit and manual recovery. People own every decision. Benefits are intended and unmeasured."/>
+          <p:cNvPicPr>
+            <a:picLocks noChangeAspect="1"/>
+          </p:cNvPicPr>
+          <p:nvPr/>
+        </p:nvPicPr>
+        <p:blipFill>
+          <a:blip r:embed="rId2"/>
+          <a:stretch>
+            <a:fillRect/>
+          </a:stretch>
+        </p:blipFill>
+        <p:spPr>
+          <a:xfrm>
+            <a:off x="1218895" y="457200"/>
+            <a:ext cx="9753904" cy="5486400"/>
+          </a:xfrm>
+          <a:prstGeom prst="rect">
+            <a:avLst/>
+          </a:prstGeom>
+        </p:spPr>
+      </p:pic>
+      <p:sp>
+        <p:nvSpPr>
+          <p:cNvPr id="3" name="TextBox 2"/>
           <p:cNvSpPr txBox="1"/>
           <p:nvPr/>
         </p:nvSpPr>
         <p:spPr>
           <a:xfrm>
-            <a:off x="594360" y="548640"/>
-            <a:ext cx="10972800" cy="274320"/>
+            <a:off x="594360" y="6217920"/>
+            <a:ext cx="10972800" cy="182880"/>
           </a:xfrm>
           <a:prstGeom prst="rect">
             <a:avLst/>
@@ -8270,70 +8441,38 @@
           <a:lstStyle/>
           <a:p>
             <a:r>
-              <a:rPr sz="1100" b="1" i="0">
-                <a:solidFill>
-                  <a:srgbClr val="183A31"/>
-                </a:solidFill>
-                <a:latin typeface="Aptos"/>
-              </a:rPr>
-              <a:t>THE CFO TEST / FICTIONAL HOME ECONOMICS, NOT A BUDGET OR WORKBENCH PRICE</a:t>
-            </a:r>
-          </a:p>
-        </p:txBody>
-      </p:sp>
-      <p:sp>
-        <p:nvSpPr>
-          <p:cNvPr id="3" name="TextBox 2"/>
-          <p:cNvSpPr txBox="1"/>
-          <p:nvPr/>
-        </p:nvSpPr>
-        <p:spPr>
-          <a:xfrm>
-            <a:off x="594360" y="1115568"/>
-            <a:ext cx="10972800" cy="1143000"/>
+              <a:rPr sz="900" b="0" i="0">
+                <a:solidFill>
+                  <a:srgbClr val="183A31"/>
+                </a:solidFill>
+                <a:latin typeface="Liberation Sans"/>
+              </a:rPr>
+              <a:t>13 / PROPOSED DESIGN; PROACTIVE WATCHERS NOT CLAIMED DEPLOYED / E05/E06/E11 / BENEFITS UNMEASURED</a:t>
+            </a:r>
+          </a:p>
+        </p:txBody>
+      </p:sp>
+      <p:sp>
+        <p:nvSpPr>
+          <p:cNvPr id="4" name="Zava logo contrast backing"/>
+          <p:cNvSpPr/>
+          <p:nvPr/>
+        </p:nvSpPr>
+        <p:spPr>
+          <a:xfrm>
+            <a:off x="10957255" y="457200"/>
+            <a:ext cx="777240" cy="271576"/>
           </a:xfrm>
           <a:prstGeom prst="rect">
             <a:avLst/>
           </a:prstGeom>
-          <a:noFill/>
-        </p:spPr>
-        <p:txBody>
-          <a:bodyPr wrap="square" lIns="0" rIns="0" tIns="0" bIns="0">
-            <a:spAutoFit/>
-          </a:bodyPr>
-          <a:lstStyle/>
-          <a:p>
-            <a:r>
-              <a:rPr sz="3800" b="1" i="0">
-                <a:solidFill>
-                  <a:srgbClr val="183A31"/>
-                </a:solidFill>
-                <a:latin typeface="Aptos Display"/>
-              </a:rPr>
-              <a:t>Stewardship means seeing cash before optimism</a:t>
-            </a:r>
-          </a:p>
-        </p:txBody>
-      </p:sp>
-      <p:sp>
-        <p:nvSpPr>
-          <p:cNvPr id="4" name="Rounded Rectangle 3"/>
-          <p:cNvSpPr/>
-          <p:nvPr/>
-        </p:nvSpPr>
-        <p:spPr>
-          <a:xfrm>
-            <a:off x="594360" y="2606040"/>
-            <a:ext cx="3429000" cy="2103120"/>
-          </a:xfrm>
-          <a:prstGeom prst="roundRect">
-            <a:avLst/>
-          </a:prstGeom>
           <a:solidFill>
-            <a:srgbClr val="173F35"/>
+            <a:srgbClr val="FFFFFF"/>
           </a:solidFill>
-          <a:ln>
-            <a:noFill/>
+          <a:ln w="12700">
+            <a:solidFill>
+              <a:srgbClr val="FFFFFF"/>
+            </a:solidFill>
           </a:ln>
         </p:spPr>
         <p:style>
@@ -8351,355 +8490,6 @@
           </a:fontRef>
         </p:style>
         <p:txBody>
-          <a:bodyPr rtlCol="0" anchor="ctr" wrap="square" lIns="228600" rIns="228600" tIns="146304" bIns="146304">
-            <a:noAutofit/>
-          </a:bodyPr>
-          <a:lstStyle/>
-          <a:p>
-            <a:pPr algn="l">
-              <a:lnSpc>
-                <a:spcPct val="105000"/>
-              </a:lnSpc>
-            </a:pPr>
-            <a:r>
-              <a:rPr sz="2400" b="0" i="0">
-                <a:solidFill>
-                  <a:srgbClr val="F7F2E7"/>
-                </a:solidFill>
-                <a:latin typeface="Aptos"/>
-              </a:rPr>
-              <a:t>£20,000</a:t>
-            </a:r>
-          </a:p>
-          <a:p>
-            <a:pPr algn="l">
-              <a:lnSpc>
-                <a:spcPct val="105000"/>
-              </a:lnSpc>
-            </a:pPr>
-            <a:r>
-              <a:rPr sz="2400" b="0" i="0">
-                <a:solidFill>
-                  <a:srgbClr val="F7F2E7"/>
-                </a:solidFill>
-                <a:latin typeface="Aptos"/>
-              </a:rPr>
-              <a:t>Gross base exposure</a:t>
-            </a:r>
-          </a:p>
-          <a:p>
-            <a:pPr algn="l">
-              <a:lnSpc>
-                <a:spcPct val="105000"/>
-              </a:lnSpc>
-            </a:pPr>
-            <a:r>
-              <a:rPr sz="2400" b="0" i="0">
-                <a:solidFill>
-                  <a:srgbClr val="F7F2E7"/>
-                </a:solidFill>
-                <a:latin typeface="Aptos"/>
-              </a:rPr>
-              <a:t>before grant cash</a:t>
-            </a:r>
-          </a:p>
-        </p:txBody>
-      </p:sp>
-      <p:sp>
-        <p:nvSpPr>
-          <p:cNvPr id="5" name="Rounded Rectangle 4"/>
-          <p:cNvSpPr/>
-          <p:nvPr/>
-        </p:nvSpPr>
-        <p:spPr>
-          <a:xfrm>
-            <a:off x="4366260" y="2606040"/>
-            <a:ext cx="3429000" cy="2103120"/>
-          </a:xfrm>
-          <a:prstGeom prst="roundRect">
-            <a:avLst/>
-          </a:prstGeom>
-          <a:solidFill>
-            <a:srgbClr val="D5E2D4"/>
-          </a:solidFill>
-          <a:ln>
-            <a:noFill/>
-          </a:ln>
-        </p:spPr>
-        <p:style>
-          <a:lnRef idx="1">
-            <a:schemeClr val="accent1"/>
-          </a:lnRef>
-          <a:fillRef idx="3">
-            <a:schemeClr val="accent1"/>
-          </a:fillRef>
-          <a:effectRef idx="0">
-            <a:schemeClr val="accent1"/>
-          </a:effectRef>
-          <a:fontRef idx="minor">
-            <a:schemeClr val="lt1"/>
-          </a:fontRef>
-        </p:style>
-        <p:txBody>
-          <a:bodyPr rtlCol="0" anchor="ctr" wrap="square" lIns="228600" rIns="228600" tIns="146304" bIns="146304">
-            <a:noAutofit/>
-          </a:bodyPr>
-          <a:lstStyle/>
-          <a:p>
-            <a:pPr algn="l">
-              <a:lnSpc>
-                <a:spcPct val="105000"/>
-              </a:lnSpc>
-            </a:pPr>
-            <a:r>
-              <a:rPr sz="2400" b="0" i="0">
-                <a:solidFill>
-                  <a:srgbClr val="183A31"/>
-                </a:solidFill>
-                <a:latin typeface="Aptos"/>
-              </a:rPr>
-              <a:t>£7,500</a:t>
-            </a:r>
-          </a:p>
-          <a:p>
-            <a:pPr algn="l">
-              <a:lnSpc>
-                <a:spcPct val="105000"/>
-              </a:lnSpc>
-            </a:pPr>
-            <a:r>
-              <a:rPr sz="2400" b="0" i="0">
-                <a:solidFill>
-                  <a:srgbClr val="183A31"/>
-                </a:solidFill>
-                <a:latin typeface="Aptos"/>
-              </a:rPr>
-              <a:t>Fictional grant</a:t>
-            </a:r>
-          </a:p>
-          <a:p>
-            <a:pPr algn="l">
-              <a:lnSpc>
-                <a:spcPct val="105000"/>
-              </a:lnSpc>
-            </a:pPr>
-            <a:r>
-              <a:rPr sz="2400" b="0" i="0">
-                <a:solidFill>
-                  <a:srgbClr val="183A31"/>
-                </a:solidFill>
-                <a:latin typeface="Aptos"/>
-              </a:rPr>
-              <a:t>—not cash yet</a:t>
-            </a:r>
-          </a:p>
-        </p:txBody>
-      </p:sp>
-      <p:sp>
-        <p:nvSpPr>
-          <p:cNvPr id="6" name="Rounded Rectangle 5"/>
-          <p:cNvSpPr/>
-          <p:nvPr/>
-        </p:nvSpPr>
-        <p:spPr>
-          <a:xfrm>
-            <a:off x="8138160" y="2606040"/>
-            <a:ext cx="3429000" cy="2103120"/>
-          </a:xfrm>
-          <a:prstGeom prst="roundRect">
-            <a:avLst/>
-          </a:prstGeom>
-          <a:solidFill>
-            <a:srgbClr val="E5B96A"/>
-          </a:solidFill>
-          <a:ln>
-            <a:noFill/>
-          </a:ln>
-        </p:spPr>
-        <p:style>
-          <a:lnRef idx="1">
-            <a:schemeClr val="accent1"/>
-          </a:lnRef>
-          <a:fillRef idx="3">
-            <a:schemeClr val="accent1"/>
-          </a:fillRef>
-          <a:effectRef idx="0">
-            <a:schemeClr val="accent1"/>
-          </a:effectRef>
-          <a:fontRef idx="minor">
-            <a:schemeClr val="lt1"/>
-          </a:fontRef>
-        </p:style>
-        <p:txBody>
-          <a:bodyPr rtlCol="0" anchor="ctr" wrap="square" lIns="228600" rIns="228600" tIns="146304" bIns="146304">
-            <a:noAutofit/>
-          </a:bodyPr>
-          <a:lstStyle/>
-          <a:p>
-            <a:pPr algn="l">
-              <a:lnSpc>
-                <a:spcPct val="105000"/>
-              </a:lnSpc>
-            </a:pPr>
-            <a:r>
-              <a:rPr sz="2400" b="0" i="0">
-                <a:solidFill>
-                  <a:srgbClr val="183A31"/>
-                </a:solidFill>
-                <a:latin typeface="Aptos"/>
-              </a:rPr>
-              <a:t>£12,500</a:t>
-            </a:r>
-          </a:p>
-          <a:p>
-            <a:pPr algn="l">
-              <a:lnSpc>
-                <a:spcPct val="105000"/>
-              </a:lnSpc>
-            </a:pPr>
-            <a:r>
-              <a:rPr sz="2400" b="0" i="0">
-                <a:solidFill>
-                  <a:srgbClr val="183A31"/>
-                </a:solidFill>
-                <a:latin typeface="Aptos"/>
-              </a:rPr>
-              <a:t>Provider funding</a:t>
-            </a:r>
-          </a:p>
-          <a:p>
-            <a:pPr algn="l">
-              <a:lnSpc>
-                <a:spcPct val="105000"/>
-              </a:lnSpc>
-            </a:pPr>
-            <a:r>
-              <a:rPr sz="2400" b="0" i="0">
-                <a:solidFill>
-                  <a:srgbClr val="183A31"/>
-                </a:solidFill>
-                <a:latin typeface="Aptos"/>
-              </a:rPr>
-              <a:t>if grant is received</a:t>
-            </a:r>
-          </a:p>
-        </p:txBody>
-      </p:sp>
-      <p:sp>
-        <p:nvSpPr>
-          <p:cNvPr id="7" name="TextBox 6"/>
-          <p:cNvSpPr txBox="1"/>
-          <p:nvPr/>
-        </p:nvSpPr>
-        <p:spPr>
-          <a:xfrm>
-            <a:off x="594360" y="5029200"/>
-            <a:ext cx="10972800" cy="777240"/>
-          </a:xfrm>
-          <a:prstGeom prst="rect">
-            <a:avLst/>
-          </a:prstGeom>
-          <a:noFill/>
-        </p:spPr>
-        <p:txBody>
-          <a:bodyPr wrap="square" lIns="0" rIns="0" tIns="0" bIns="0">
-            <a:spAutoFit/>
-          </a:bodyPr>
-          <a:lstStyle/>
-          <a:p>
-            <a:r>
-              <a:rPr sz="2200" b="0" i="0">
-                <a:solidFill>
-                  <a:srgbClr val="183A31"/>
-                </a:solidFill>
-                <a:latin typeface="Aptos"/>
-              </a:rPr>
-              <a:t>If contingency is spent: £22,000 gross / £14,500 provider exposure.</a:t>
-            </a:r>
-          </a:p>
-          <a:p>
-            <a:r>
-              <a:rPr sz="2200" b="0" i="0">
-                <a:solidFill>
-                  <a:srgbClr val="183A31"/>
-                </a:solidFill>
-                <a:latin typeface="Aptos"/>
-              </a:rPr>
-              <a:t>Application ≠ award ≠ claim ≠ cash.</a:t>
-            </a:r>
-          </a:p>
-        </p:txBody>
-      </p:sp>
-      <p:sp>
-        <p:nvSpPr>
-          <p:cNvPr id="8" name="TextBox 7"/>
-          <p:cNvSpPr txBox="1"/>
-          <p:nvPr/>
-        </p:nvSpPr>
-        <p:spPr>
-          <a:xfrm>
-            <a:off x="594360" y="6126480"/>
-            <a:ext cx="10972800" cy="256032"/>
-          </a:xfrm>
-          <a:prstGeom prst="rect">
-            <a:avLst/>
-          </a:prstGeom>
-          <a:noFill/>
-        </p:spPr>
-        <p:txBody>
-          <a:bodyPr wrap="square" lIns="0" rIns="0" tIns="0" bIns="0">
-            <a:spAutoFit/>
-          </a:bodyPr>
-          <a:lstStyle/>
-          <a:p>
-            <a:r>
-              <a:rPr sz="1100" b="0" i="0">
-                <a:solidFill>
-                  <a:srgbClr val="183A31"/>
-                </a:solidFill>
-                <a:latin typeface="Aptos"/>
-              </a:rPr>
-              <a:t>13 / FICTIONAL EXA-010/015 / E06 / NO REAL AWARD, COVENANT HEADROOM OR SPENDING AUTHORITY CLAIMED</a:t>
-            </a:r>
-          </a:p>
-        </p:txBody>
-      </p:sp>
-      <p:sp>
-        <p:nvSpPr>
-          <p:cNvPr id="9" name="Zava logo contrast backing"/>
-          <p:cNvSpPr/>
-          <p:nvPr/>
-        </p:nvSpPr>
-        <p:spPr>
-          <a:xfrm>
-            <a:off x="11231575" y="91440"/>
-            <a:ext cx="777240" cy="271551"/>
-          </a:xfrm>
-          <a:prstGeom prst="rect">
-            <a:avLst/>
-          </a:prstGeom>
-          <a:solidFill>
-            <a:srgbClr val="FFFFFF"/>
-          </a:solidFill>
-          <a:ln>
-            <a:noFill/>
-          </a:ln>
-        </p:spPr>
-        <p:style>
-          <a:lnRef idx="1">
-            <a:schemeClr val="accent1"/>
-          </a:lnRef>
-          <a:fillRef idx="3">
-            <a:schemeClr val="accent1"/>
-          </a:fillRef>
-          <a:effectRef idx="2">
-            <a:schemeClr val="accent1"/>
-          </a:effectRef>
-          <a:fontRef idx="minor">
-            <a:schemeClr val="lt1"/>
-          </a:fontRef>
-        </p:style>
-        <p:txBody>
           <a:bodyPr rtlCol="0" anchor="ctr"/>
           <a:lstStyle/>
           <a:p>
@@ -8709,7 +8499,7 @@
       </p:sp>
       <p:pic>
         <p:nvPicPr>
-          <p:cNvPr id="10" name="Zava branding logo" descr="image.png"/>
+          <p:cNvPr id="5" name="Zava branding logo" descr="image.png"/>
           <p:cNvPicPr>
             <a:picLocks noChangeAspect="1"/>
           </p:cNvPicPr>
@@ -8723,8 +8513,8 @@
         </p:blipFill>
         <p:spPr>
           <a:xfrm>
-            <a:off x="11231575" y="91440"/>
-            <a:ext cx="777240" cy="271551"/>
+            <a:off x="10957255" y="457200"/>
+            <a:ext cx="777240" cy="271576"/>
           </a:xfrm>
           <a:prstGeom prst="rect">
             <a:avLst/>
@@ -8786,7 +8576,7 @@
                 </a:solidFill>
                 <a:latin typeface="Aptos"/>
               </a:rPr>
-              <a:t>SUPPORTED CHANGE / EXISTING TEAMS AND SUPPLIERS</a:t>
+              <a:t>THE CFO TEST / FICTIONAL HOME ECONOMICS, NOT A BUDGET OR WORKBENCH PRICE</a:t>
             </a:r>
           </a:p>
         </p:txBody>
@@ -8820,7 +8610,7 @@
                 </a:solidFill>
                 <a:latin typeface="Aptos Display"/>
               </a:rPr>
-              <a:t>Make the first change small enough to learn</a:t>
+              <a:t>Stewardship means seeing cash before optimism</a:t>
             </a:r>
           </a:p>
         </p:txBody>
@@ -8834,7 +8624,7 @@
         <p:spPr>
           <a:xfrm>
             <a:off x="594360" y="2606040"/>
-            <a:ext cx="2468880" cy="2606040"/>
+            <a:ext cx="3429000" cy="2103120"/>
           </a:xfrm>
           <a:prstGeom prst="roundRect">
             <a:avLst/>
@@ -8861,7 +8651,7 @@
           </a:fontRef>
         </p:style>
         <p:txBody>
-          <a:bodyPr rtlCol="0" anchor="ctr" wrap="square" lIns="182880" rIns="182880" tIns="146304" bIns="146304">
+          <a:bodyPr rtlCol="0" anchor="ctr" wrap="square" lIns="228600" rIns="228600" tIns="146304" bIns="146304">
             <a:noAutofit/>
           </a:bodyPr>
           <a:lstStyle/>
@@ -8872,61 +8662,45 @@
               </a:lnSpc>
             </a:pPr>
             <a:r>
-              <a:rPr sz="1900" b="0" i="0">
+              <a:rPr sz="2400" b="0" i="0">
                 <a:solidFill>
                   <a:srgbClr val="F7F2E7"/>
                 </a:solidFill>
                 <a:latin typeface="Aptos"/>
               </a:rPr>
-              <a:t>1 / CO-DESIGN</a:t>
-            </a:r>
-          </a:p>
-          <a:p>
-            <a:pPr algn="l">
-              <a:lnSpc>
-                <a:spcPct val="105000"/>
-              </a:lnSpc>
-            </a:pPr>
-            <a:r>
-              <a:rPr sz="1900" b="0" i="0">
+              <a:t>£20,000</a:t>
+            </a:r>
+          </a:p>
+          <a:p>
+            <a:pPr algn="l">
+              <a:lnSpc>
+                <a:spcPct val="105000"/>
+              </a:lnSpc>
+            </a:pPr>
+            <a:r>
+              <a:rPr sz="2400" b="0" i="0">
                 <a:solidFill>
                   <a:srgbClr val="F7F2E7"/>
                 </a:solidFill>
                 <a:latin typeface="Aptos"/>
               </a:rPr>
-              <a:t>Programme Manager</a:t>
-            </a:r>
-          </a:p>
-          <a:p>
-            <a:pPr algn="l">
-              <a:lnSpc>
-                <a:spcPct val="105000"/>
-              </a:lnSpc>
-            </a:pPr>
-            <a:r>
-              <a:rPr sz="1900" b="0" i="0">
+              <a:t>Gross base exposure</a:t>
+            </a:r>
+          </a:p>
+          <a:p>
+            <a:pPr algn="l">
+              <a:lnSpc>
+                <a:spcPct val="105000"/>
+              </a:lnSpc>
+            </a:pPr>
+            <a:r>
+              <a:rPr sz="2400" b="0" i="0">
                 <a:solidFill>
                   <a:srgbClr val="F7F2E7"/>
                 </a:solidFill>
                 <a:latin typeface="Aptos"/>
               </a:rPr>
-              <a:t>Workbook owners</a:t>
-            </a:r>
-          </a:p>
-          <a:p>
-            <a:pPr algn="l">
-              <a:lnSpc>
-                <a:spcPct val="105000"/>
-              </a:lnSpc>
-            </a:pPr>
-            <a:r>
-              <a:rPr sz="1900" b="0" i="0">
-                <a:solidFill>
-                  <a:srgbClr val="F7F2E7"/>
-                </a:solidFill>
-                <a:latin typeface="Aptos"/>
-              </a:rPr>
-              <a:t>Tasks + baseline</a:t>
+              <a:t>before grant cash</a:t>
             </a:r>
           </a:p>
         </p:txBody>
@@ -8939,8 +8713,8 @@
         </p:nvSpPr>
         <p:spPr>
           <a:xfrm>
-            <a:off x="3429000" y="2606040"/>
-            <a:ext cx="2468880" cy="2606040"/>
+            <a:off x="4366260" y="2606040"/>
+            <a:ext cx="3429000" cy="2103120"/>
           </a:xfrm>
           <a:prstGeom prst="roundRect">
             <a:avLst/>
@@ -8967,7 +8741,7 @@
           </a:fontRef>
         </p:style>
         <p:txBody>
-          <a:bodyPr rtlCol="0" anchor="ctr" wrap="square" lIns="182880" rIns="182880" tIns="146304" bIns="146304">
+          <a:bodyPr rtlCol="0" anchor="ctr" wrap="square" lIns="228600" rIns="228600" tIns="146304" bIns="146304">
             <a:noAutofit/>
           </a:bodyPr>
           <a:lstStyle/>
@@ -8978,77 +8752,45 @@
               </a:lnSpc>
             </a:pPr>
             <a:r>
-              <a:rPr sz="1900" b="0" i="0">
-                <a:solidFill>
-                  <a:srgbClr val="183A31"/>
-                </a:solidFill>
-                <a:latin typeface="Aptos"/>
-              </a:rPr>
-              <a:t>2 / CONNECT</a:t>
-            </a:r>
-          </a:p>
-          <a:p>
-            <a:pPr algn="l">
-              <a:lnSpc>
-                <a:spcPct val="105000"/>
-              </a:lnSpc>
-            </a:pPr>
-            <a:r>
-              <a:rPr sz="1900" b="0" i="0">
-                <a:solidFill>
-                  <a:srgbClr val="183A31"/>
-                </a:solidFill>
-                <a:latin typeface="Aptos"/>
-              </a:rPr>
-              <a:t>Data owner</a:t>
-            </a:r>
-          </a:p>
-          <a:p>
-            <a:pPr algn="l">
-              <a:lnSpc>
-                <a:spcPct val="105000"/>
-              </a:lnSpc>
-            </a:pPr>
-            <a:r>
-              <a:rPr sz="1900" b="0" i="0">
-                <a:solidFill>
-                  <a:srgbClr val="183A31"/>
-                </a:solidFill>
-                <a:latin typeface="Aptos"/>
-              </a:rPr>
-              <a:t>One home first</a:t>
-            </a:r>
-          </a:p>
-          <a:p>
-            <a:pPr algn="l">
-              <a:lnSpc>
-                <a:spcPct val="105000"/>
-              </a:lnSpc>
-            </a:pPr>
-            <a:r>
-              <a:rPr sz="1900" b="0" i="0">
-                <a:solidFill>
-                  <a:srgbClr val="183A31"/>
-                </a:solidFill>
-                <a:latin typeface="Aptos"/>
-              </a:rPr>
-              <a:t>Shadow import</a:t>
-            </a:r>
-          </a:p>
-          <a:p>
-            <a:pPr algn="l">
-              <a:lnSpc>
-                <a:spcPct val="105000"/>
-              </a:lnSpc>
-            </a:pPr>
-            <a:r>
-              <a:rPr sz="1900" b="0" i="0">
-                <a:solidFill>
-                  <a:srgbClr val="183A31"/>
-                </a:solidFill>
-                <a:latin typeface="Aptos"/>
-              </a:rPr>
-              <a:t>Quarantine conflicts</a:t>
+              <a:rPr sz="2400" b="0" i="0">
+                <a:solidFill>
+                  <a:srgbClr val="183A31"/>
+                </a:solidFill>
+                <a:latin typeface="Aptos"/>
+              </a:rPr>
+              <a:t>£7,500</a:t>
+            </a:r>
+          </a:p>
+          <a:p>
+            <a:pPr algn="l">
+              <a:lnSpc>
+                <a:spcPct val="105000"/>
+              </a:lnSpc>
+            </a:pPr>
+            <a:r>
+              <a:rPr sz="2400" b="0" i="0">
+                <a:solidFill>
+                  <a:srgbClr val="183A31"/>
+                </a:solidFill>
+                <a:latin typeface="Aptos"/>
+              </a:rPr>
+              <a:t>Fictional grant</a:t>
+            </a:r>
+          </a:p>
+          <a:p>
+            <a:pPr algn="l">
+              <a:lnSpc>
+                <a:spcPct val="105000"/>
+              </a:lnSpc>
+            </a:pPr>
+            <a:r>
+              <a:rPr sz="2400" b="0" i="0">
+                <a:solidFill>
+                  <a:srgbClr val="183A31"/>
+                </a:solidFill>
+                <a:latin typeface="Aptos"/>
+              </a:rPr>
+              <a:t>—not cash yet</a:t>
             </a:r>
           </a:p>
         </p:txBody>
@@ -9061,130 +8803,8 @@
         </p:nvSpPr>
         <p:spPr>
           <a:xfrm>
-            <a:off x="6263640" y="2606040"/>
-            <a:ext cx="2468880" cy="2606040"/>
-          </a:xfrm>
-          <a:prstGeom prst="roundRect">
-            <a:avLst/>
-          </a:prstGeom>
-          <a:solidFill>
-            <a:srgbClr val="D5E2D4"/>
-          </a:solidFill>
-          <a:ln>
-            <a:noFill/>
-          </a:ln>
-        </p:spPr>
-        <p:style>
-          <a:lnRef idx="1">
-            <a:schemeClr val="accent1"/>
-          </a:lnRef>
-          <a:fillRef idx="3">
-            <a:schemeClr val="accent1"/>
-          </a:fillRef>
-          <a:effectRef idx="0">
-            <a:schemeClr val="accent1"/>
-          </a:effectRef>
-          <a:fontRef idx="minor">
-            <a:schemeClr val="lt1"/>
-          </a:fontRef>
-        </p:style>
-        <p:txBody>
-          <a:bodyPr rtlCol="0" anchor="ctr" wrap="square" lIns="182880" rIns="182880" tIns="146304" bIns="146304">
-            <a:noAutofit/>
-          </a:bodyPr>
-          <a:lstStyle/>
-          <a:p>
-            <a:pPr algn="l">
-              <a:lnSpc>
-                <a:spcPct val="105000"/>
-              </a:lnSpc>
-            </a:pPr>
-            <a:r>
-              <a:rPr sz="1900" b="0" i="0">
-                <a:solidFill>
-                  <a:srgbClr val="183A31"/>
-                </a:solidFill>
-                <a:latin typeface="Aptos"/>
-              </a:rPr>
-              <a:t>3 / REHEARSE</a:t>
-            </a:r>
-          </a:p>
-          <a:p>
-            <a:pPr algn="l">
-              <a:lnSpc>
-                <a:spcPct val="105000"/>
-              </a:lnSpc>
-            </a:pPr>
-            <a:r>
-              <a:rPr sz="1900" b="0" i="0">
-                <a:solidFill>
-                  <a:srgbClr val="183A31"/>
-                </a:solidFill>
-                <a:latin typeface="Aptos"/>
-              </a:rPr>
-              <a:t>Team leads</a:t>
-            </a:r>
-          </a:p>
-          <a:p>
-            <a:pPr algn="l">
-              <a:lnSpc>
-                <a:spcPct val="105000"/>
-              </a:lnSpc>
-            </a:pPr>
-            <a:r>
-              <a:rPr sz="1900" b="0" i="0">
-                <a:solidFill>
-                  <a:srgbClr val="183A31"/>
-                </a:solidFill>
-                <a:latin typeface="Aptos"/>
-              </a:rPr>
-              <a:t>Task walkthroughs</a:t>
-            </a:r>
-          </a:p>
-          <a:p>
-            <a:pPr algn="l">
-              <a:lnSpc>
-                <a:spcPct val="105000"/>
-              </a:lnSpc>
-            </a:pPr>
-            <a:r>
-              <a:rPr sz="1900" b="0" i="0">
-                <a:solidFill>
-                  <a:srgbClr val="183A31"/>
-                </a:solidFill>
-                <a:latin typeface="Aptos"/>
-              </a:rPr>
-              <a:t>Named support</a:t>
-            </a:r>
-          </a:p>
-          <a:p>
-            <a:pPr algn="l">
-              <a:lnSpc>
-                <a:spcPct val="105000"/>
-              </a:lnSpc>
-            </a:pPr>
-            <a:r>
-              <a:rPr sz="1900" b="0" i="0">
-                <a:solidFill>
-                  <a:srgbClr val="183A31"/>
-                </a:solidFill>
-                <a:latin typeface="Aptos"/>
-              </a:rPr>
-              <a:t>Short parallel run</a:t>
-            </a:r>
-          </a:p>
-        </p:txBody>
-      </p:sp>
-      <p:sp>
-        <p:nvSpPr>
-          <p:cNvPr id="7" name="Rounded Rectangle 6"/>
-          <p:cNvSpPr/>
-          <p:nvPr/>
-        </p:nvSpPr>
-        <p:spPr>
-          <a:xfrm>
-            <a:off x="9098280" y="2606040"/>
-            <a:ext cx="2468880" cy="2606040"/>
+            <a:off x="8138160" y="2606040"/>
+            <a:ext cx="3429000" cy="2103120"/>
           </a:xfrm>
           <a:prstGeom prst="roundRect">
             <a:avLst/>
@@ -9211,7 +8831,7 @@
           </a:fontRef>
         </p:style>
         <p:txBody>
-          <a:bodyPr rtlCol="0" anchor="ctr" wrap="square" lIns="182880" rIns="182880" tIns="146304" bIns="146304">
+          <a:bodyPr rtlCol="0" anchor="ctr" wrap="square" lIns="228600" rIns="228600" tIns="146304" bIns="146304">
             <a:noAutofit/>
           </a:bodyPr>
           <a:lstStyle/>
@@ -9222,91 +8842,59 @@
               </a:lnSpc>
             </a:pPr>
             <a:r>
-              <a:rPr sz="1900" b="0" i="0">
-                <a:solidFill>
-                  <a:srgbClr val="183A31"/>
-                </a:solidFill>
-                <a:latin typeface="Aptos"/>
-              </a:rPr>
-              <a:t>4 / SWITCH</a:t>
-            </a:r>
-          </a:p>
-          <a:p>
-            <a:pPr algn="l">
-              <a:lnSpc>
-                <a:spcPct val="105000"/>
-              </a:lnSpc>
-            </a:pPr>
-            <a:r>
-              <a:rPr sz="1900" b="0" i="0">
-                <a:solidFill>
-                  <a:srgbClr val="183A31"/>
-                </a:solidFill>
-                <a:latin typeface="Aptos"/>
-              </a:rPr>
-              <a:t>Digital + work owner</a:t>
-            </a:r>
-          </a:p>
-          <a:p>
-            <a:pPr algn="l">
-              <a:lnSpc>
-                <a:spcPct val="105000"/>
-              </a:lnSpc>
-            </a:pPr>
-            <a:r>
-              <a:rPr sz="1900" b="0" i="0">
-                <a:solidFill>
-                  <a:srgbClr val="183A31"/>
-                </a:solidFill>
-                <a:latin typeface="Aptos"/>
-              </a:rPr>
-              <a:t>Exit tests + rollback</a:t>
-            </a:r>
-          </a:p>
-          <a:p>
-            <a:pPr algn="l">
-              <a:lnSpc>
-                <a:spcPct val="105000"/>
-              </a:lnSpc>
-            </a:pPr>
-            <a:r>
-              <a:rPr sz="1900" b="0" i="0">
-                <a:solidFill>
-                  <a:srgbClr val="183A31"/>
-                </a:solidFill>
-                <a:latin typeface="Aptos"/>
-              </a:rPr>
-              <a:t>Workbench writes</a:t>
-            </a:r>
-          </a:p>
-          <a:p>
-            <a:pPr algn="l">
-              <a:lnSpc>
-                <a:spcPct val="105000"/>
-              </a:lnSpc>
-            </a:pPr>
-            <a:r>
-              <a:rPr sz="1900" b="0" i="0">
-                <a:solidFill>
-                  <a:srgbClr val="183A31"/>
-                </a:solidFill>
-                <a:latin typeface="Aptos"/>
-              </a:rPr>
-              <a:t>Excel reports</a:t>
-            </a:r>
-          </a:p>
-        </p:txBody>
-      </p:sp>
-      <p:sp>
-        <p:nvSpPr>
-          <p:cNvPr id="8" name="TextBox 7"/>
+              <a:rPr sz="2400" b="0" i="0">
+                <a:solidFill>
+                  <a:srgbClr val="183A31"/>
+                </a:solidFill>
+                <a:latin typeface="Aptos"/>
+              </a:rPr>
+              <a:t>£12,500</a:t>
+            </a:r>
+          </a:p>
+          <a:p>
+            <a:pPr algn="l">
+              <a:lnSpc>
+                <a:spcPct val="105000"/>
+              </a:lnSpc>
+            </a:pPr>
+            <a:r>
+              <a:rPr sz="2400" b="0" i="0">
+                <a:solidFill>
+                  <a:srgbClr val="183A31"/>
+                </a:solidFill>
+                <a:latin typeface="Aptos"/>
+              </a:rPr>
+              <a:t>Provider funding</a:t>
+            </a:r>
+          </a:p>
+          <a:p>
+            <a:pPr algn="l">
+              <a:lnSpc>
+                <a:spcPct val="105000"/>
+              </a:lnSpc>
+            </a:pPr>
+            <a:r>
+              <a:rPr sz="2400" b="0" i="0">
+                <a:solidFill>
+                  <a:srgbClr val="183A31"/>
+                </a:solidFill>
+                <a:latin typeface="Aptos"/>
+              </a:rPr>
+              <a:t>if grant is received</a:t>
+            </a:r>
+          </a:p>
+        </p:txBody>
+      </p:sp>
+      <p:sp>
+        <p:nvSpPr>
+          <p:cNvPr id="7" name="TextBox 6"/>
           <p:cNvSpPr txBox="1"/>
           <p:nvPr/>
         </p:nvSpPr>
         <p:spPr>
           <a:xfrm>
-            <a:off x="594360" y="5532120"/>
-            <a:ext cx="10972800" cy="320040"/>
+            <a:off x="594360" y="5029200"/>
+            <a:ext cx="10972800" cy="777240"/>
           </a:xfrm>
           <a:prstGeom prst="rect">
             <a:avLst/>
@@ -9320,20 +8908,31 @@
           <a:lstStyle/>
           <a:p>
             <a:r>
-              <a:rPr sz="2000" b="0" i="0">
-                <a:solidFill>
-                  <a:srgbClr val="183A31"/>
-                </a:solidFill>
-                <a:latin typeface="Aptos"/>
-              </a:rPr>
-              <a:t>No permanent dual entry. No compulsory portal. No big-bang replacement.</a:t>
-            </a:r>
-          </a:p>
-        </p:txBody>
-      </p:sp>
-      <p:sp>
-        <p:nvSpPr>
-          <p:cNvPr id="9" name="TextBox 8"/>
+              <a:rPr sz="2200" b="0" i="0">
+                <a:solidFill>
+                  <a:srgbClr val="183A31"/>
+                </a:solidFill>
+                <a:latin typeface="Aptos"/>
+              </a:rPr>
+              <a:t>If contingency is spent: £22,000 gross / £14,500 provider exposure.</a:t>
+            </a:r>
+          </a:p>
+          <a:p>
+            <a:r>
+              <a:rPr sz="2200" b="0" i="0">
+                <a:solidFill>
+                  <a:srgbClr val="183A31"/>
+                </a:solidFill>
+                <a:latin typeface="Aptos"/>
+              </a:rPr>
+              <a:t>Application ≠ award ≠ claim ≠ cash.</a:t>
+            </a:r>
+          </a:p>
+        </p:txBody>
+      </p:sp>
+      <p:sp>
+        <p:nvSpPr>
+          <p:cNvPr id="8" name="TextBox 7"/>
           <p:cNvSpPr txBox="1"/>
           <p:nvPr/>
         </p:nvSpPr>
@@ -9360,14 +8959,14 @@
                 </a:solidFill>
                 <a:latin typeface="Aptos"/>
               </a:rPr>
-              <a:t>14 / PROPOSED ADOPTION JOURNEY / E05/E09/E12 / ROLE ASSIGNMENTS AND EXIT THRESHOLDS TO CONFIRM</a:t>
-            </a:r>
-          </a:p>
-        </p:txBody>
-      </p:sp>
-      <p:sp>
-        <p:nvSpPr>
-          <p:cNvPr id="10" name="Zava logo contrast backing"/>
+              <a:t>14 / FICTIONAL EXA-010/015 / E06 / NO REAL AWARD, COVENANT HEADROOM OR SPENDING AUTHORITY CLAIMED</a:t>
+            </a:r>
+          </a:p>
+        </p:txBody>
+      </p:sp>
+      <p:sp>
+        <p:nvSpPr>
+          <p:cNvPr id="9" name="Zava logo contrast backing"/>
           <p:cNvSpPr/>
           <p:nvPr/>
         </p:nvSpPr>
@@ -9410,7 +9009,7 @@
       </p:sp>
       <p:pic>
         <p:nvPicPr>
-          <p:cNvPr id="11" name="Zava branding logo" descr="image.png"/>
+          <p:cNvPr id="10" name="Zava branding logo" descr="image.png"/>
           <p:cNvPicPr>
             <a:picLocks noChangeAspect="1"/>
           </p:cNvPicPr>
@@ -9487,7 +9086,7 @@
                 </a:solidFill>
                 <a:latin typeface="Aptos"/>
               </a:rPr>
-              <a:t>A DASHBOARD RUNS THE WORK / A FROZEN COMPARISON TESTS THE CLAIM</a:t>
+              <a:t>SUPPORTED CHANGE / EXISTING TEAMS AND SUPPLIERS</a:t>
             </a:r>
           </a:p>
         </p:txBody>
@@ -9521,7 +9120,7 @@
                 </a:solidFill>
                 <a:latin typeface="Aptos Display"/>
               </a:rPr>
-              <a:t>Prove the programme. Test the AI separately.</a:t>
+              <a:t>Make the first change small enough to learn</a:t>
             </a:r>
           </a:p>
         </p:txBody>
@@ -9535,7 +9134,7 @@
         <p:spPr>
           <a:xfrm>
             <a:off x="594360" y="2606040"/>
-            <a:ext cx="5326380" cy="2606040"/>
+            <a:ext cx="2468880" cy="2606040"/>
           </a:xfrm>
           <a:prstGeom prst="roundRect">
             <a:avLst/>
@@ -9562,7 +9161,7 @@
           </a:fontRef>
         </p:style>
         <p:txBody>
-          <a:bodyPr rtlCol="0" anchor="ctr" wrap="square" lIns="228600" rIns="228600" tIns="146304" bIns="146304">
+          <a:bodyPr rtlCol="0" anchor="ctr" wrap="square" lIns="182880" rIns="182880" tIns="146304" bIns="146304">
             <a:noAutofit/>
           </a:bodyPr>
           <a:lstStyle/>
@@ -9573,77 +9172,61 @@
               </a:lnSpc>
             </a:pPr>
             <a:r>
-              <a:rPr sz="2100" b="0" i="0">
+              <a:rPr sz="1900" b="0" i="0">
                 <a:solidFill>
                   <a:srgbClr val="F7F2E7"/>
                 </a:solidFill>
                 <a:latin typeface="Aptos"/>
               </a:rPr>
-              <a:t>1 / PROGRAMME COMPARISON</a:t>
-            </a:r>
-          </a:p>
-          <a:p>
-            <a:pPr algn="l">
-              <a:lnSpc>
-                <a:spcPct val="105000"/>
-              </a:lnSpc>
-            </a:pPr>
-            <a:r>
-              <a:rPr sz="2100" b="0" i="0">
+              <a:t>1 / CO-DESIGN</a:t>
+            </a:r>
+          </a:p>
+          <a:p>
+            <a:pPr algn="l">
+              <a:lnSpc>
+                <a:spcPct val="105000"/>
+              </a:lnSpc>
+            </a:pPr>
+            <a:r>
+              <a:rPr sz="1900" b="0" i="0">
                 <a:solidFill>
                   <a:srgbClr val="F7F2E7"/>
                 </a:solidFill>
                 <a:latin typeface="Aptos"/>
               </a:rPr>
-              <a:t>Existing teams: assisted vs usual delivery</a:t>
-            </a:r>
-          </a:p>
-          <a:p>
-            <a:pPr algn="l">
-              <a:lnSpc>
-                <a:spcPct val="105000"/>
-              </a:lnSpc>
-            </a:pPr>
-            <a:r>
-              <a:rPr sz="2100" b="0" i="0">
+              <a:t>Programme Manager</a:t>
+            </a:r>
+          </a:p>
+          <a:p>
+            <a:pPr algn="l">
+              <a:lnSpc>
+                <a:spcPct val="105000"/>
+              </a:lnSpc>
+            </a:pPr>
+            <a:r>
+              <a:rPr sz="1900" b="0" i="0">
                 <a:solidFill>
                   <a:srgbClr val="F7F2E7"/>
                 </a:solidFill>
                 <a:latin typeface="Aptos"/>
               </a:rPr>
-              <a:t>Same events + frozen cohort</a:t>
-            </a:r>
-          </a:p>
-          <a:p>
-            <a:pPr algn="l">
-              <a:lnSpc>
-                <a:spcPct val="105000"/>
-              </a:lnSpc>
-            </a:pPr>
-            <a:r>
-              <a:rPr sz="2100" b="0" i="0">
+              <a:t>Workbook owners</a:t>
+            </a:r>
+          </a:p>
+          <a:p>
+            <a:pPr algn="l">
+              <a:lnSpc>
+                <a:spcPct val="105000"/>
+              </a:lnSpc>
+            </a:pPr>
+            <a:r>
+              <a:rPr sz="1900" b="0" i="0">
                 <a:solidFill>
                   <a:srgbClr val="F7F2E7"/>
                 </a:solidFill>
                 <a:latin typeface="Aptos"/>
               </a:rPr>
-              <a:t>Accepted handovers + whole-chain cost</a:t>
-            </a:r>
-          </a:p>
-          <a:p>
-            <a:pPr algn="l">
-              <a:lnSpc>
-                <a:spcPct val="105000"/>
-              </a:lnSpc>
-            </a:pPr>
-            <a:r>
-              <a:rPr sz="2100" b="0" i="0">
-                <a:solidFill>
-                  <a:srgbClr val="F7F2E7"/>
-                </a:solidFill>
-                <a:latin typeface="Aptos"/>
-              </a:rPr>
-              <a:t>Shared resources + displacement</a:t>
+              <a:t>Tasks + baseline</a:t>
             </a:r>
           </a:p>
         </p:txBody>
@@ -9656,8 +9239,8 @@
         </p:nvSpPr>
         <p:spPr>
           <a:xfrm>
-            <a:off x="6240780" y="2606040"/>
-            <a:ext cx="5326380" cy="2606040"/>
+            <a:off x="3429000" y="2606040"/>
+            <a:ext cx="2468880" cy="2606040"/>
           </a:xfrm>
           <a:prstGeom prst="roundRect">
             <a:avLst/>
@@ -9684,7 +9267,7 @@
           </a:fontRef>
         </p:style>
         <p:txBody>
-          <a:bodyPr rtlCol="0" anchor="ctr" wrap="square" lIns="228600" rIns="228600" tIns="146304" bIns="146304">
+          <a:bodyPr rtlCol="0" anchor="ctr" wrap="square" lIns="182880" rIns="182880" tIns="146304" bIns="146304">
             <a:noAutofit/>
           </a:bodyPr>
           <a:lstStyle/>
@@ -9695,84 +9278,328 @@
               </a:lnSpc>
             </a:pPr>
             <a:r>
-              <a:rPr sz="2100" b="0" i="0">
-                <a:solidFill>
-                  <a:srgbClr val="183A31"/>
-                </a:solidFill>
-                <a:latin typeface="Aptos"/>
-              </a:rPr>
-              <a:t>2 / AI TASK COMPARISON</a:t>
-            </a:r>
-          </a:p>
-          <a:p>
-            <a:pPr algn="l">
-              <a:lnSpc>
-                <a:spcPct val="105000"/>
-              </a:lnSpc>
-            </a:pPr>
-            <a:r>
-              <a:rPr sz="2100" b="0" i="0">
-                <a:solidFill>
-                  <a:srgbClr val="183A31"/>
-                </a:solidFill>
-                <a:latin typeface="Aptos"/>
-              </a:rPr>
-              <a:t>Same inputs; manual / rules vs AI</a:t>
-            </a:r>
-          </a:p>
-          <a:p>
-            <a:pPr algn="l">
-              <a:lnSpc>
-                <a:spcPct val="105000"/>
-              </a:lnSpc>
-            </a:pPr>
-            <a:r>
-              <a:rPr sz="2100" b="0" i="0">
-                <a:solidFill>
-                  <a:srgbClr val="183A31"/>
-                </a:solidFill>
-                <a:latin typeface="Aptos"/>
-              </a:rPr>
-              <a:t>Paired, reviewed outcomes</a:t>
-            </a:r>
-          </a:p>
-          <a:p>
-            <a:pPr algn="l">
-              <a:lnSpc>
-                <a:spcPct val="105000"/>
-              </a:lnSpc>
-            </a:pPr>
-            <a:r>
-              <a:rPr sz="2100" b="0" i="0">
-                <a:solidFill>
-                  <a:srgbClr val="183A31"/>
-                </a:solidFill>
-                <a:latin typeface="Aptos"/>
-              </a:rPr>
-              <a:t>Review + correction + recording effort</a:t>
-            </a:r>
-          </a:p>
-          <a:p>
-            <a:pPr algn="l">
-              <a:lnSpc>
-                <a:spcPct val="105000"/>
-              </a:lnSpc>
-            </a:pPr>
-            <a:r>
-              <a:rPr sz="2100" b="0" i="0">
-                <a:solidFill>
-                  <a:srgbClr val="183A31"/>
-                </a:solidFill>
-                <a:latin typeface="Aptos"/>
-              </a:rPr>
-              <a:t>Errors + delay + latency + cost</a:t>
-            </a:r>
-          </a:p>
-        </p:txBody>
-      </p:sp>
-      <p:sp>
-        <p:nvSpPr>
-          <p:cNvPr id="6" name="TextBox 5"/>
+              <a:rPr sz="1900" b="0" i="0">
+                <a:solidFill>
+                  <a:srgbClr val="183A31"/>
+                </a:solidFill>
+                <a:latin typeface="Aptos"/>
+              </a:rPr>
+              <a:t>2 / CONNECT</a:t>
+            </a:r>
+          </a:p>
+          <a:p>
+            <a:pPr algn="l">
+              <a:lnSpc>
+                <a:spcPct val="105000"/>
+              </a:lnSpc>
+            </a:pPr>
+            <a:r>
+              <a:rPr sz="1900" b="0" i="0">
+                <a:solidFill>
+                  <a:srgbClr val="183A31"/>
+                </a:solidFill>
+                <a:latin typeface="Aptos"/>
+              </a:rPr>
+              <a:t>Data owner</a:t>
+            </a:r>
+          </a:p>
+          <a:p>
+            <a:pPr algn="l">
+              <a:lnSpc>
+                <a:spcPct val="105000"/>
+              </a:lnSpc>
+            </a:pPr>
+            <a:r>
+              <a:rPr sz="1900" b="0" i="0">
+                <a:solidFill>
+                  <a:srgbClr val="183A31"/>
+                </a:solidFill>
+                <a:latin typeface="Aptos"/>
+              </a:rPr>
+              <a:t>One home first</a:t>
+            </a:r>
+          </a:p>
+          <a:p>
+            <a:pPr algn="l">
+              <a:lnSpc>
+                <a:spcPct val="105000"/>
+              </a:lnSpc>
+            </a:pPr>
+            <a:r>
+              <a:rPr sz="1900" b="0" i="0">
+                <a:solidFill>
+                  <a:srgbClr val="183A31"/>
+                </a:solidFill>
+                <a:latin typeface="Aptos"/>
+              </a:rPr>
+              <a:t>Shadow import</a:t>
+            </a:r>
+          </a:p>
+          <a:p>
+            <a:pPr algn="l">
+              <a:lnSpc>
+                <a:spcPct val="105000"/>
+              </a:lnSpc>
+            </a:pPr>
+            <a:r>
+              <a:rPr sz="1900" b="0" i="0">
+                <a:solidFill>
+                  <a:srgbClr val="183A31"/>
+                </a:solidFill>
+                <a:latin typeface="Aptos"/>
+              </a:rPr>
+              <a:t>Quarantine conflicts</a:t>
+            </a:r>
+          </a:p>
+        </p:txBody>
+      </p:sp>
+      <p:sp>
+        <p:nvSpPr>
+          <p:cNvPr id="6" name="Rounded Rectangle 5"/>
+          <p:cNvSpPr/>
+          <p:nvPr/>
+        </p:nvSpPr>
+        <p:spPr>
+          <a:xfrm>
+            <a:off x="6263640" y="2606040"/>
+            <a:ext cx="2468880" cy="2606040"/>
+          </a:xfrm>
+          <a:prstGeom prst="roundRect">
+            <a:avLst/>
+          </a:prstGeom>
+          <a:solidFill>
+            <a:srgbClr val="D5E2D4"/>
+          </a:solidFill>
+          <a:ln>
+            <a:noFill/>
+          </a:ln>
+        </p:spPr>
+        <p:style>
+          <a:lnRef idx="1">
+            <a:schemeClr val="accent1"/>
+          </a:lnRef>
+          <a:fillRef idx="3">
+            <a:schemeClr val="accent1"/>
+          </a:fillRef>
+          <a:effectRef idx="0">
+            <a:schemeClr val="accent1"/>
+          </a:effectRef>
+          <a:fontRef idx="minor">
+            <a:schemeClr val="lt1"/>
+          </a:fontRef>
+        </p:style>
+        <p:txBody>
+          <a:bodyPr rtlCol="0" anchor="ctr" wrap="square" lIns="182880" rIns="182880" tIns="146304" bIns="146304">
+            <a:noAutofit/>
+          </a:bodyPr>
+          <a:lstStyle/>
+          <a:p>
+            <a:pPr algn="l">
+              <a:lnSpc>
+                <a:spcPct val="105000"/>
+              </a:lnSpc>
+            </a:pPr>
+            <a:r>
+              <a:rPr sz="1900" b="0" i="0">
+                <a:solidFill>
+                  <a:srgbClr val="183A31"/>
+                </a:solidFill>
+                <a:latin typeface="Aptos"/>
+              </a:rPr>
+              <a:t>3 / REHEARSE</a:t>
+            </a:r>
+          </a:p>
+          <a:p>
+            <a:pPr algn="l">
+              <a:lnSpc>
+                <a:spcPct val="105000"/>
+              </a:lnSpc>
+            </a:pPr>
+            <a:r>
+              <a:rPr sz="1900" b="0" i="0">
+                <a:solidFill>
+                  <a:srgbClr val="183A31"/>
+                </a:solidFill>
+                <a:latin typeface="Aptos"/>
+              </a:rPr>
+              <a:t>Team leads</a:t>
+            </a:r>
+          </a:p>
+          <a:p>
+            <a:pPr algn="l">
+              <a:lnSpc>
+                <a:spcPct val="105000"/>
+              </a:lnSpc>
+            </a:pPr>
+            <a:r>
+              <a:rPr sz="1900" b="0" i="0">
+                <a:solidFill>
+                  <a:srgbClr val="183A31"/>
+                </a:solidFill>
+                <a:latin typeface="Aptos"/>
+              </a:rPr>
+              <a:t>Task walkthroughs</a:t>
+            </a:r>
+          </a:p>
+          <a:p>
+            <a:pPr algn="l">
+              <a:lnSpc>
+                <a:spcPct val="105000"/>
+              </a:lnSpc>
+            </a:pPr>
+            <a:r>
+              <a:rPr sz="1900" b="0" i="0">
+                <a:solidFill>
+                  <a:srgbClr val="183A31"/>
+                </a:solidFill>
+                <a:latin typeface="Aptos"/>
+              </a:rPr>
+              <a:t>Named support</a:t>
+            </a:r>
+          </a:p>
+          <a:p>
+            <a:pPr algn="l">
+              <a:lnSpc>
+                <a:spcPct val="105000"/>
+              </a:lnSpc>
+            </a:pPr>
+            <a:r>
+              <a:rPr sz="1900" b="0" i="0">
+                <a:solidFill>
+                  <a:srgbClr val="183A31"/>
+                </a:solidFill>
+                <a:latin typeface="Aptos"/>
+              </a:rPr>
+              <a:t>Short parallel run</a:t>
+            </a:r>
+          </a:p>
+        </p:txBody>
+      </p:sp>
+      <p:sp>
+        <p:nvSpPr>
+          <p:cNvPr id="7" name="Rounded Rectangle 6"/>
+          <p:cNvSpPr/>
+          <p:nvPr/>
+        </p:nvSpPr>
+        <p:spPr>
+          <a:xfrm>
+            <a:off x="9098280" y="2606040"/>
+            <a:ext cx="2468880" cy="2606040"/>
+          </a:xfrm>
+          <a:prstGeom prst="roundRect">
+            <a:avLst/>
+          </a:prstGeom>
+          <a:solidFill>
+            <a:srgbClr val="E5B96A"/>
+          </a:solidFill>
+          <a:ln>
+            <a:noFill/>
+          </a:ln>
+        </p:spPr>
+        <p:style>
+          <a:lnRef idx="1">
+            <a:schemeClr val="accent1"/>
+          </a:lnRef>
+          <a:fillRef idx="3">
+            <a:schemeClr val="accent1"/>
+          </a:fillRef>
+          <a:effectRef idx="0">
+            <a:schemeClr val="accent1"/>
+          </a:effectRef>
+          <a:fontRef idx="minor">
+            <a:schemeClr val="lt1"/>
+          </a:fontRef>
+        </p:style>
+        <p:txBody>
+          <a:bodyPr rtlCol="0" anchor="ctr" wrap="square" lIns="182880" rIns="182880" tIns="146304" bIns="146304">
+            <a:noAutofit/>
+          </a:bodyPr>
+          <a:lstStyle/>
+          <a:p>
+            <a:pPr algn="l">
+              <a:lnSpc>
+                <a:spcPct val="105000"/>
+              </a:lnSpc>
+            </a:pPr>
+            <a:r>
+              <a:rPr sz="1900" b="0" i="0">
+                <a:solidFill>
+                  <a:srgbClr val="183A31"/>
+                </a:solidFill>
+                <a:latin typeface="Aptos"/>
+              </a:rPr>
+              <a:t>4 / SWITCH</a:t>
+            </a:r>
+          </a:p>
+          <a:p>
+            <a:pPr algn="l">
+              <a:lnSpc>
+                <a:spcPct val="105000"/>
+              </a:lnSpc>
+            </a:pPr>
+            <a:r>
+              <a:rPr sz="1900" b="0" i="0">
+                <a:solidFill>
+                  <a:srgbClr val="183A31"/>
+                </a:solidFill>
+                <a:latin typeface="Aptos"/>
+              </a:rPr>
+              <a:t>Digital + work owner</a:t>
+            </a:r>
+          </a:p>
+          <a:p>
+            <a:pPr algn="l">
+              <a:lnSpc>
+                <a:spcPct val="105000"/>
+              </a:lnSpc>
+            </a:pPr>
+            <a:r>
+              <a:rPr sz="1900" b="0" i="0">
+                <a:solidFill>
+                  <a:srgbClr val="183A31"/>
+                </a:solidFill>
+                <a:latin typeface="Aptos"/>
+              </a:rPr>
+              <a:t>Exit tests + rollback</a:t>
+            </a:r>
+          </a:p>
+          <a:p>
+            <a:pPr algn="l">
+              <a:lnSpc>
+                <a:spcPct val="105000"/>
+              </a:lnSpc>
+            </a:pPr>
+            <a:r>
+              <a:rPr sz="1900" b="0" i="0">
+                <a:solidFill>
+                  <a:srgbClr val="183A31"/>
+                </a:solidFill>
+                <a:latin typeface="Aptos"/>
+              </a:rPr>
+              <a:t>Workbench writes</a:t>
+            </a:r>
+          </a:p>
+          <a:p>
+            <a:pPr algn="l">
+              <a:lnSpc>
+                <a:spcPct val="105000"/>
+              </a:lnSpc>
+            </a:pPr>
+            <a:r>
+              <a:rPr sz="1900" b="0" i="0">
+                <a:solidFill>
+                  <a:srgbClr val="183A31"/>
+                </a:solidFill>
+                <a:latin typeface="Aptos"/>
+              </a:rPr>
+              <a:t>Excel reports</a:t>
+            </a:r>
+          </a:p>
+        </p:txBody>
+      </p:sp>
+      <p:sp>
+        <p:nvSpPr>
+          <p:cNvPr id="8" name="TextBox 7"/>
           <p:cNvSpPr txBox="1"/>
           <p:nvPr/>
         </p:nvSpPr>
@@ -9793,20 +9620,20 @@
           <a:lstStyle/>
           <a:p>
             <a:r>
-              <a:rPr sz="1800" b="0" i="0">
-                <a:solidFill>
-                  <a:srgbClr val="183A31"/>
-                </a:solidFill>
-                <a:latin typeface="Aptos"/>
-              </a:rPr>
-              <a:t>Include unfinished and withdrawn homes. Protect safety, choice, quality, equity and cash.</a:t>
-            </a:r>
-          </a:p>
-        </p:txBody>
-      </p:sp>
-      <p:sp>
-        <p:nvSpPr>
-          <p:cNvPr id="7" name="TextBox 6"/>
+              <a:rPr sz="2000" b="0" i="0">
+                <a:solidFill>
+                  <a:srgbClr val="183A31"/>
+                </a:solidFill>
+                <a:latin typeface="Aptos"/>
+              </a:rPr>
+              <a:t>No permanent dual entry. No compulsory portal. No big-bang replacement.</a:t>
+            </a:r>
+          </a:p>
+        </p:txBody>
+      </p:sp>
+      <p:sp>
+        <p:nvSpPr>
+          <p:cNvPr id="9" name="TextBox 8"/>
           <p:cNvSpPr txBox="1"/>
           <p:nvPr/>
         </p:nvSpPr>
@@ -9833,14 +9660,14 @@
                 </a:solidFill>
                 <a:latin typeface="Aptos"/>
               </a:rPr>
-              <a:t>15 / PROPOSED EVALUATION / E05/E11 / EFFECTS UNMEASURED; PARALLEL EXPERIMENT HAS NO RESULTS HERE</a:t>
-            </a:r>
-          </a:p>
-        </p:txBody>
-      </p:sp>
-      <p:sp>
-        <p:nvSpPr>
-          <p:cNvPr id="8" name="Zava logo contrast backing"/>
+              <a:t>15 / PROPOSED ADOPTION JOURNEY / E05/E09/E12 / ROLE ASSIGNMENTS AND EXIT THRESHOLDS TO CONFIRM</a:t>
+            </a:r>
+          </a:p>
+        </p:txBody>
+      </p:sp>
+      <p:sp>
+        <p:nvSpPr>
+          <p:cNvPr id="10" name="Zava logo contrast backing"/>
           <p:cNvSpPr/>
           <p:nvPr/>
         </p:nvSpPr>
@@ -9883,7 +9710,7 @@
       </p:sp>
       <p:pic>
         <p:nvPicPr>
-          <p:cNvPr id="9" name="Zava branding logo" descr="image.png"/>
+          <p:cNvPr id="11" name="Zava branding logo" descr="image.png"/>
           <p:cNvPicPr>
             <a:picLocks noChangeAspect="1"/>
           </p:cNvPicPr>
@@ -9960,7 +9787,7 @@
                 </a:solidFill>
                 <a:latin typeface="Aptos"/>
               </a:rPr>
-              <a:t>GATED EVIDENCE STAGE / PROPOSED OWNERS, NOT DELEGATED AUTHORITY</a:t>
+              <a:t>A DASHBOARD RUNS THE WORK / A FROZEN COMPARISON TESTS THE CLAIM</a:t>
             </a:r>
           </a:p>
         </p:txBody>
@@ -9994,7 +9821,7 @@
                 </a:solidFill>
                 <a:latin typeface="Aptos Display"/>
               </a:rPr>
-              <a:t>Earn the next gate. Do not leap into production.</a:t>
+              <a:t>Prove the programme. Test the AI separately.</a:t>
             </a:r>
           </a:p>
         </p:txBody>
@@ -10008,7 +9835,7 @@
         <p:spPr>
           <a:xfrm>
             <a:off x="594360" y="2606040"/>
-            <a:ext cx="2468880" cy="2834640"/>
+            <a:ext cx="5326380" cy="2606040"/>
           </a:xfrm>
           <a:prstGeom prst="roundRect">
             <a:avLst/>
@@ -10035,7 +9862,7 @@
           </a:fontRef>
         </p:style>
         <p:txBody>
-          <a:bodyPr rtlCol="0" anchor="ctr" wrap="square" lIns="182880" rIns="182880" tIns="146304" bIns="146304">
+          <a:bodyPr rtlCol="0" anchor="ctr" wrap="square" lIns="228600" rIns="228600" tIns="146304" bIns="146304">
             <a:noAutofit/>
           </a:bodyPr>
           <a:lstStyle/>
@@ -10046,77 +9873,77 @@
               </a:lnSpc>
             </a:pPr>
             <a:r>
-              <a:rPr sz="2000" b="0" i="0">
+              <a:rPr sz="2100" b="0" i="0">
                 <a:solidFill>
                   <a:srgbClr val="F7F2E7"/>
                 </a:solidFill>
                 <a:latin typeface="Aptos"/>
               </a:rPr>
-              <a:t>1 / AGREE</a:t>
-            </a:r>
-          </a:p>
-          <a:p>
-            <a:pPr algn="l">
-              <a:lnSpc>
-                <a:spcPct val="105000"/>
-              </a:lnSpc>
-            </a:pPr>
-            <a:r>
-              <a:rPr sz="2000" b="0" i="0">
+              <a:t>1 / PROGRAMME COMPARISON</a:t>
+            </a:r>
+          </a:p>
+          <a:p>
+            <a:pPr algn="l">
+              <a:lnSpc>
+                <a:spcPct val="105000"/>
+              </a:lnSpc>
+            </a:pPr>
+            <a:r>
+              <a:rPr sz="2100" b="0" i="0">
                 <a:solidFill>
                   <a:srgbClr val="F7F2E7"/>
                 </a:solidFill>
                 <a:latin typeface="Aptos"/>
               </a:rPr>
-              <a:t>Sponsor + Assets</a:t>
-            </a:r>
-          </a:p>
-          <a:p>
-            <a:pPr algn="l">
-              <a:lnSpc>
-                <a:spcPct val="105000"/>
-              </a:lnSpc>
-            </a:pPr>
-            <a:r>
-              <a:rPr sz="2000" b="0" i="0">
+              <a:t>Existing teams: assisted vs usual delivery</a:t>
+            </a:r>
+          </a:p>
+          <a:p>
+            <a:pPr algn="l">
+              <a:lnSpc>
+                <a:spcPct val="105000"/>
+              </a:lnSpc>
+            </a:pPr>
+            <a:r>
+              <a:rPr sz="2100" b="0" i="0">
                 <a:solidFill>
                   <a:srgbClr val="F7F2E7"/>
                 </a:solidFill>
                 <a:latin typeface="Aptos"/>
               </a:rPr>
-              <a:t>Requirements</a:t>
-            </a:r>
-          </a:p>
-          <a:p>
-            <a:pPr algn="l">
-              <a:lnSpc>
-                <a:spcPct val="105000"/>
-              </a:lnSpc>
-            </a:pPr>
-            <a:r>
-              <a:rPr sz="2000" b="0" i="0">
+              <a:t>Same events + frozen cohort</a:t>
+            </a:r>
+          </a:p>
+          <a:p>
+            <a:pPr algn="l">
+              <a:lnSpc>
+                <a:spcPct val="105000"/>
+              </a:lnSpc>
+            </a:pPr>
+            <a:r>
+              <a:rPr sz="2100" b="0" i="0">
                 <a:solidFill>
                   <a:srgbClr val="F7F2E7"/>
                 </a:solidFill>
                 <a:latin typeface="Aptos"/>
               </a:rPr>
-              <a:t>Control owners</a:t>
-            </a:r>
-          </a:p>
-          <a:p>
-            <a:pPr algn="l">
-              <a:lnSpc>
-                <a:spcPct val="105000"/>
-              </a:lnSpc>
-            </a:pPr>
-            <a:r>
-              <a:rPr sz="2000" b="0" i="0">
+              <a:t>Accepted handovers + whole-chain cost</a:t>
+            </a:r>
+          </a:p>
+          <a:p>
+            <a:pPr algn="l">
+              <a:lnSpc>
+                <a:spcPct val="105000"/>
+              </a:lnSpc>
+            </a:pPr>
+            <a:r>
+              <a:rPr sz="2100" b="0" i="0">
                 <a:solidFill>
                   <a:srgbClr val="F7F2E7"/>
                 </a:solidFill>
                 <a:latin typeface="Aptos"/>
               </a:rPr>
-              <a:t>Scope + authority</a:t>
+              <a:t>Shared resources + displacement</a:t>
             </a:r>
           </a:p>
         </p:txBody>
@@ -10129,8 +9956,8 @@
         </p:nvSpPr>
         <p:spPr>
           <a:xfrm>
-            <a:off x="3429000" y="2606040"/>
-            <a:ext cx="2468880" cy="2834640"/>
+            <a:off x="6240780" y="2606040"/>
+            <a:ext cx="5326380" cy="2606040"/>
           </a:xfrm>
           <a:prstGeom prst="roundRect">
             <a:avLst/>
@@ -10157,7 +9984,7 @@
           </a:fontRef>
         </p:style>
         <p:txBody>
-          <a:bodyPr rtlCol="0" anchor="ctr" wrap="square" lIns="182880" rIns="182880" tIns="146304" bIns="146304">
+          <a:bodyPr rtlCol="0" anchor="ctr" wrap="square" lIns="228600" rIns="228600" tIns="146304" bIns="146304">
             <a:noAutofit/>
           </a:bodyPr>
           <a:lstStyle/>
@@ -10168,319 +9995,91 @@
               </a:lnSpc>
             </a:pPr>
             <a:r>
-              <a:rPr sz="2000" b="0" i="0">
-                <a:solidFill>
-                  <a:srgbClr val="183A31"/>
-                </a:solidFill>
-                <a:latin typeface="Aptos"/>
-              </a:rPr>
-              <a:t>2 / CONNECT</a:t>
-            </a:r>
-          </a:p>
-          <a:p>
-            <a:pPr algn="l">
-              <a:lnSpc>
-                <a:spcPct val="105000"/>
-              </a:lnSpc>
-            </a:pPr>
-            <a:r>
-              <a:rPr sz="2000" b="0" i="0">
-                <a:solidFill>
-                  <a:srgbClr val="183A31"/>
-                </a:solidFill>
-                <a:latin typeface="Aptos"/>
-              </a:rPr>
-              <a:t>Programme + Digital</a:t>
-            </a:r>
-          </a:p>
-          <a:p>
-            <a:pPr algn="l">
-              <a:lnSpc>
-                <a:spcPct val="105000"/>
-              </a:lnSpc>
-            </a:pPr>
-            <a:r>
-              <a:rPr sz="2000" b="0" i="0">
-                <a:solidFill>
-                  <a:srgbClr val="183A31"/>
-                </a:solidFill>
-                <a:latin typeface="Aptos"/>
-              </a:rPr>
-              <a:t>Same-home trace</a:t>
-            </a:r>
-          </a:p>
-          <a:p>
-            <a:pPr algn="l">
-              <a:lnSpc>
-                <a:spcPct val="105000"/>
-              </a:lnSpc>
-            </a:pPr>
-            <a:r>
-              <a:rPr sz="2000" b="0" i="0">
-                <a:solidFill>
-                  <a:srgbClr val="183A31"/>
-                </a:solidFill>
-                <a:latin typeface="Aptos"/>
-              </a:rPr>
-              <a:t>Real services</a:t>
-            </a:r>
-          </a:p>
-          <a:p>
-            <a:pPr algn="l">
-              <a:lnSpc>
-                <a:spcPct val="105000"/>
-              </a:lnSpc>
-            </a:pPr>
-            <a:r>
-              <a:rPr sz="2000" b="0" i="0">
-                <a:solidFill>
-                  <a:srgbClr val="183A31"/>
-                </a:solidFill>
-                <a:latin typeface="Aptos"/>
-              </a:rPr>
-              <a:t>Negative tests</a:t>
-            </a:r>
-          </a:p>
-        </p:txBody>
-      </p:sp>
-      <p:sp>
-        <p:nvSpPr>
-          <p:cNvPr id="6" name="Rounded Rectangle 5"/>
-          <p:cNvSpPr/>
-          <p:nvPr/>
-        </p:nvSpPr>
-        <p:spPr>
-          <a:xfrm>
-            <a:off x="6263640" y="2606040"/>
-            <a:ext cx="2468880" cy="2834640"/>
-          </a:xfrm>
-          <a:prstGeom prst="roundRect">
-            <a:avLst/>
-          </a:prstGeom>
-          <a:solidFill>
-            <a:srgbClr val="D5E2D4"/>
-          </a:solidFill>
-          <a:ln>
-            <a:noFill/>
-          </a:ln>
-        </p:spPr>
-        <p:style>
-          <a:lnRef idx="1">
-            <a:schemeClr val="accent1"/>
-          </a:lnRef>
-          <a:fillRef idx="3">
-            <a:schemeClr val="accent1"/>
-          </a:fillRef>
-          <a:effectRef idx="0">
-            <a:schemeClr val="accent1"/>
-          </a:effectRef>
-          <a:fontRef idx="minor">
-            <a:schemeClr val="lt1"/>
-          </a:fontRef>
-        </p:style>
-        <p:txBody>
-          <a:bodyPr rtlCol="0" anchor="ctr" wrap="square" lIns="182880" rIns="182880" tIns="146304" bIns="146304">
-            <a:noAutofit/>
-          </a:bodyPr>
-          <a:lstStyle/>
-          <a:p>
-            <a:pPr algn="l">
-              <a:lnSpc>
-                <a:spcPct val="105000"/>
-              </a:lnSpc>
-            </a:pPr>
-            <a:r>
-              <a:rPr sz="2000" b="0" i="0">
-                <a:solidFill>
-                  <a:srgbClr val="183A31"/>
-                </a:solidFill>
-                <a:latin typeface="Aptos"/>
-              </a:rPr>
-              <a:t>3 / PROVE</a:t>
-            </a:r>
-          </a:p>
-          <a:p>
-            <a:pPr algn="l">
-              <a:lnSpc>
-                <a:spcPct val="105000"/>
-              </a:lnSpc>
-            </a:pPr>
-            <a:r>
-              <a:rPr sz="2000" b="0" i="0">
-                <a:solidFill>
-                  <a:srgbClr val="183A31"/>
-                </a:solidFill>
-                <a:latin typeface="Aptos"/>
-              </a:rPr>
-              <a:t>Data + Finance + CIO</a:t>
-            </a:r>
-          </a:p>
-          <a:p>
-            <a:pPr algn="l">
-              <a:lnSpc>
-                <a:spcPct val="105000"/>
-              </a:lnSpc>
-            </a:pPr>
-            <a:r>
-              <a:rPr sz="2000" b="0" i="0">
-                <a:solidFill>
-                  <a:srgbClr val="183A31"/>
-                </a:solidFill>
-                <a:latin typeface="Aptos"/>
-              </a:rPr>
-              <a:t>Net value + cost</a:t>
-            </a:r>
-          </a:p>
-          <a:p>
-            <a:pPr algn="l">
-              <a:lnSpc>
-                <a:spcPct val="105000"/>
-              </a:lnSpc>
-            </a:pPr>
-            <a:r>
-              <a:rPr sz="2000" b="0" i="0">
-                <a:solidFill>
-                  <a:srgbClr val="183A31"/>
-                </a:solidFill>
-                <a:latin typeface="Aptos"/>
-              </a:rPr>
-              <a:t>Rights + recovery</a:t>
-            </a:r>
-          </a:p>
-        </p:txBody>
-      </p:sp>
-      <p:sp>
-        <p:nvSpPr>
-          <p:cNvPr id="7" name="Rounded Rectangle 6"/>
-          <p:cNvSpPr/>
-          <p:nvPr/>
-        </p:nvSpPr>
-        <p:spPr>
-          <a:xfrm>
-            <a:off x="9098280" y="2606040"/>
-            <a:ext cx="2468880" cy="2834640"/>
-          </a:xfrm>
-          <a:prstGeom prst="roundRect">
-            <a:avLst/>
-          </a:prstGeom>
-          <a:solidFill>
-            <a:srgbClr val="E5B96A"/>
-          </a:solidFill>
-          <a:ln>
-            <a:noFill/>
-          </a:ln>
-        </p:spPr>
-        <p:style>
-          <a:lnRef idx="1">
-            <a:schemeClr val="accent1"/>
-          </a:lnRef>
-          <a:fillRef idx="3">
-            <a:schemeClr val="accent1"/>
-          </a:fillRef>
-          <a:effectRef idx="0">
-            <a:schemeClr val="accent1"/>
-          </a:effectRef>
-          <a:fontRef idx="minor">
-            <a:schemeClr val="lt1"/>
-          </a:fontRef>
-        </p:style>
-        <p:txBody>
-          <a:bodyPr rtlCol="0" anchor="ctr" wrap="square" lIns="182880" rIns="182880" tIns="146304" bIns="146304">
-            <a:noAutofit/>
-          </a:bodyPr>
-          <a:lstStyle/>
-          <a:p>
-            <a:pPr algn="l">
-              <a:lnSpc>
-                <a:spcPct val="105000"/>
-              </a:lnSpc>
-            </a:pPr>
-            <a:r>
-              <a:rPr sz="2000" b="0" i="0">
-                <a:solidFill>
-                  <a:srgbClr val="183A31"/>
-                </a:solidFill>
-                <a:latin typeface="Aptos"/>
-              </a:rPr>
-              <a:t>4 / DECIDE</a:t>
-            </a:r>
-          </a:p>
-          <a:p>
-            <a:pPr algn="l">
-              <a:lnSpc>
-                <a:spcPct val="105000"/>
-              </a:lnSpc>
-            </a:pPr>
-            <a:r>
-              <a:rPr sz="2000" b="0" i="0">
-                <a:solidFill>
-                  <a:srgbClr val="183A31"/>
-                </a:solidFill>
-                <a:latin typeface="Aptos"/>
-              </a:rPr>
-              <a:t>Sponsor + owners</a:t>
-            </a:r>
-          </a:p>
-          <a:p>
-            <a:pPr algn="l">
-              <a:lnSpc>
-                <a:spcPct val="105000"/>
-              </a:lnSpc>
-            </a:pPr>
-            <a:r>
-              <a:rPr sz="2000" b="0" i="0">
-                <a:solidFill>
-                  <a:srgbClr val="183A31"/>
-                </a:solidFill>
-                <a:latin typeface="Aptos"/>
-              </a:rPr>
-              <a:t>Evidence-led return</a:t>
-            </a:r>
-          </a:p>
-          <a:p>
-            <a:pPr algn="l">
-              <a:lnSpc>
-                <a:spcPct val="105000"/>
-              </a:lnSpc>
-            </a:pPr>
-            <a:r>
-              <a:rPr sz="2000" b="0" i="0">
-                <a:solidFill>
-                  <a:srgbClr val="183A31"/>
-                </a:solidFill>
-                <a:latin typeface="Aptos"/>
-              </a:rPr>
-              <a:t>Continue,</a:t>
-            </a:r>
-          </a:p>
-          <a:p>
-            <a:pPr algn="l">
-              <a:lnSpc>
-                <a:spcPct val="105000"/>
-              </a:lnSpc>
-            </a:pPr>
-            <a:r>
-              <a:rPr sz="2000" b="0" i="0">
-                <a:solidFill>
-                  <a:srgbClr val="183A31"/>
-                </a:solidFill>
-                <a:latin typeface="Aptos"/>
-              </a:rPr>
-              <a:t>simplify or stop</a:t>
-            </a:r>
-          </a:p>
-        </p:txBody>
-      </p:sp>
-      <p:sp>
-        <p:nvSpPr>
-          <p:cNvPr id="8" name="TextBox 7"/>
+              <a:rPr sz="2100" b="0" i="0">
+                <a:solidFill>
+                  <a:srgbClr val="183A31"/>
+                </a:solidFill>
+                <a:latin typeface="Aptos"/>
+              </a:rPr>
+              <a:t>2 / AI TASK COMPARISON</a:t>
+            </a:r>
+          </a:p>
+          <a:p>
+            <a:pPr algn="l">
+              <a:lnSpc>
+                <a:spcPct val="105000"/>
+              </a:lnSpc>
+            </a:pPr>
+            <a:r>
+              <a:rPr sz="2100" b="0" i="0">
+                <a:solidFill>
+                  <a:srgbClr val="183A31"/>
+                </a:solidFill>
+                <a:latin typeface="Aptos"/>
+              </a:rPr>
+              <a:t>Same inputs; manual / rules vs AI</a:t>
+            </a:r>
+          </a:p>
+          <a:p>
+            <a:pPr algn="l">
+              <a:lnSpc>
+                <a:spcPct val="105000"/>
+              </a:lnSpc>
+            </a:pPr>
+            <a:r>
+              <a:rPr sz="2100" b="0" i="0">
+                <a:solidFill>
+                  <a:srgbClr val="183A31"/>
+                </a:solidFill>
+                <a:latin typeface="Aptos"/>
+              </a:rPr>
+              <a:t>Paired, reviewed outcomes</a:t>
+            </a:r>
+          </a:p>
+          <a:p>
+            <a:pPr algn="l">
+              <a:lnSpc>
+                <a:spcPct val="105000"/>
+              </a:lnSpc>
+            </a:pPr>
+            <a:r>
+              <a:rPr sz="2100" b="0" i="0">
+                <a:solidFill>
+                  <a:srgbClr val="183A31"/>
+                </a:solidFill>
+                <a:latin typeface="Aptos"/>
+              </a:rPr>
+              <a:t>Review + correction + recording effort</a:t>
+            </a:r>
+          </a:p>
+          <a:p>
+            <a:pPr algn="l">
+              <a:lnSpc>
+                <a:spcPct val="105000"/>
+              </a:lnSpc>
+            </a:pPr>
+            <a:r>
+              <a:rPr sz="2100" b="0" i="0">
+                <a:solidFill>
+                  <a:srgbClr val="183A31"/>
+                </a:solidFill>
+                <a:latin typeface="Aptos"/>
+              </a:rPr>
+              <a:t>Errors + delay + latency + cost</a:t>
+            </a:r>
+          </a:p>
+        </p:txBody>
+      </p:sp>
+      <p:sp>
+        <p:nvSpPr>
+          <p:cNvPr id="6" name="TextBox 5"/>
           <p:cNvSpPr txBox="1"/>
           <p:nvPr/>
         </p:nvSpPr>
         <p:spPr>
           <a:xfrm>
-            <a:off x="594360" y="6126480"/>
-            <a:ext cx="10972800" cy="256032"/>
+            <a:off x="594360" y="5532120"/>
+            <a:ext cx="10972800" cy="320040"/>
           </a:xfrm>
           <a:prstGeom prst="rect">
             <a:avLst/>
@@ -10494,20 +10093,54 @@
           <a:lstStyle/>
           <a:p>
             <a:r>
+              <a:rPr sz="1800" b="0" i="0">
+                <a:solidFill>
+                  <a:srgbClr val="183A31"/>
+                </a:solidFill>
+                <a:latin typeface="Aptos"/>
+              </a:rPr>
+              <a:t>Include unfinished and withdrawn homes. Protect safety, choice, quality, equity and cash.</a:t>
+            </a:r>
+          </a:p>
+        </p:txBody>
+      </p:sp>
+      <p:sp>
+        <p:nvSpPr>
+          <p:cNvPr id="7" name="TextBox 6"/>
+          <p:cNvSpPr txBox="1"/>
+          <p:nvPr/>
+        </p:nvSpPr>
+        <p:spPr>
+          <a:xfrm>
+            <a:off x="594360" y="6126480"/>
+            <a:ext cx="10972800" cy="256032"/>
+          </a:xfrm>
+          <a:prstGeom prst="rect">
+            <a:avLst/>
+          </a:prstGeom>
+          <a:noFill/>
+        </p:spPr>
+        <p:txBody>
+          <a:bodyPr wrap="square" lIns="0" rIns="0" tIns="0" bIns="0">
+            <a:spAutoFit/>
+          </a:bodyPr>
+          <a:lstStyle/>
+          <a:p>
+            <a:r>
               <a:rPr sz="1100" b="0" i="0">
                 <a:solidFill>
                   <a:srgbClr val="183A31"/>
                 </a:solidFill>
                 <a:latin typeface="Aptos"/>
               </a:rPr>
-              <a:t>16 / PROPOSED GATES / E06–E10 / NO NEW SPEND, DEPLOYMENT OR LIVE PILOT AUTHORITY</a:t>
-            </a:r>
-          </a:p>
-        </p:txBody>
-      </p:sp>
-      <p:sp>
-        <p:nvSpPr>
-          <p:cNvPr id="9" name="Zava logo contrast backing"/>
+              <a:t>16 / PROPOSED EVALUATION / E05/E11 / EFFECTS UNMEASURED; PARALLEL EXPERIMENT HAS NO RESULTS HERE</a:t>
+            </a:r>
+          </a:p>
+        </p:txBody>
+      </p:sp>
+      <p:sp>
+        <p:nvSpPr>
+          <p:cNvPr id="8" name="Zava logo contrast backing"/>
           <p:cNvSpPr/>
           <p:nvPr/>
         </p:nvSpPr>
@@ -10550,7 +10183,7 @@
       </p:sp>
       <p:pic>
         <p:nvPicPr>
-          <p:cNvPr id="10" name="Zava branding logo" descr="image.png"/>
+          <p:cNvPr id="9" name="Zava branding logo" descr="image.png"/>
           <p:cNvPicPr>
             <a:picLocks noChangeAspect="1"/>
           </p:cNvPicPr>
@@ -10581,6 +10214,673 @@
 </file>
 
 <file path=ppt/slides/slide17.xml><?xml version="1.0" encoding="utf-8"?>
+<p:sld xmlns:a="http://schemas.openxmlformats.org/drawingml/2006/main" xmlns:p="http://schemas.openxmlformats.org/presentationml/2006/main" xmlns:r="http://schemas.openxmlformats.org/officeDocument/2006/relationships">
+  <p:cSld>
+    <p:bg>
+      <p:bgPr>
+        <a:solidFill>
+          <a:srgbClr val="F7F2E7"/>
+        </a:solidFill>
+        <a:effectLst/>
+      </p:bgPr>
+    </p:bg>
+    <p:spTree>
+      <p:nvGrpSpPr>
+        <p:cNvPr id="1" name=""/>
+        <p:cNvGrpSpPr/>
+        <p:nvPr/>
+      </p:nvGrpSpPr>
+      <p:grpSpPr/>
+      <p:sp>
+        <p:nvSpPr>
+          <p:cNvPr id="2" name="TextBox 1"/>
+          <p:cNvSpPr txBox="1"/>
+          <p:nvPr/>
+        </p:nvSpPr>
+        <p:spPr>
+          <a:xfrm>
+            <a:off x="594360" y="548640"/>
+            <a:ext cx="10972800" cy="274320"/>
+          </a:xfrm>
+          <a:prstGeom prst="rect">
+            <a:avLst/>
+          </a:prstGeom>
+          <a:noFill/>
+        </p:spPr>
+        <p:txBody>
+          <a:bodyPr wrap="square" lIns="0" rIns="0" tIns="0" bIns="0">
+            <a:spAutoFit/>
+          </a:bodyPr>
+          <a:lstStyle/>
+          <a:p>
+            <a:r>
+              <a:rPr sz="1100" b="1" i="0">
+                <a:solidFill>
+                  <a:srgbClr val="183A31"/>
+                </a:solidFill>
+                <a:latin typeface="Aptos"/>
+              </a:rPr>
+              <a:t>GATED EVIDENCE STAGE / PROPOSED OWNERS, NOT DELEGATED AUTHORITY</a:t>
+            </a:r>
+          </a:p>
+        </p:txBody>
+      </p:sp>
+      <p:sp>
+        <p:nvSpPr>
+          <p:cNvPr id="3" name="TextBox 2"/>
+          <p:cNvSpPr txBox="1"/>
+          <p:nvPr/>
+        </p:nvSpPr>
+        <p:spPr>
+          <a:xfrm>
+            <a:off x="594360" y="1115568"/>
+            <a:ext cx="10972800" cy="1143000"/>
+          </a:xfrm>
+          <a:prstGeom prst="rect">
+            <a:avLst/>
+          </a:prstGeom>
+          <a:noFill/>
+        </p:spPr>
+        <p:txBody>
+          <a:bodyPr wrap="square" lIns="0" rIns="0" tIns="0" bIns="0">
+            <a:spAutoFit/>
+          </a:bodyPr>
+          <a:lstStyle/>
+          <a:p>
+            <a:r>
+              <a:rPr sz="3800" b="1" i="0">
+                <a:solidFill>
+                  <a:srgbClr val="183A31"/>
+                </a:solidFill>
+                <a:latin typeface="Aptos Display"/>
+              </a:rPr>
+              <a:t>Earn the next gate. Do not leap into production.</a:t>
+            </a:r>
+          </a:p>
+        </p:txBody>
+      </p:sp>
+      <p:sp>
+        <p:nvSpPr>
+          <p:cNvPr id="4" name="Rounded Rectangle 3"/>
+          <p:cNvSpPr/>
+          <p:nvPr/>
+        </p:nvSpPr>
+        <p:spPr>
+          <a:xfrm>
+            <a:off x="594360" y="2606040"/>
+            <a:ext cx="2468880" cy="2834640"/>
+          </a:xfrm>
+          <a:prstGeom prst="roundRect">
+            <a:avLst/>
+          </a:prstGeom>
+          <a:solidFill>
+            <a:srgbClr val="173F35"/>
+          </a:solidFill>
+          <a:ln>
+            <a:noFill/>
+          </a:ln>
+        </p:spPr>
+        <p:style>
+          <a:lnRef idx="1">
+            <a:schemeClr val="accent1"/>
+          </a:lnRef>
+          <a:fillRef idx="3">
+            <a:schemeClr val="accent1"/>
+          </a:fillRef>
+          <a:effectRef idx="0">
+            <a:schemeClr val="accent1"/>
+          </a:effectRef>
+          <a:fontRef idx="minor">
+            <a:schemeClr val="lt1"/>
+          </a:fontRef>
+        </p:style>
+        <p:txBody>
+          <a:bodyPr rtlCol="0" anchor="ctr" wrap="square" lIns="182880" rIns="182880" tIns="146304" bIns="146304">
+            <a:noAutofit/>
+          </a:bodyPr>
+          <a:lstStyle/>
+          <a:p>
+            <a:pPr algn="l">
+              <a:lnSpc>
+                <a:spcPct val="105000"/>
+              </a:lnSpc>
+            </a:pPr>
+            <a:r>
+              <a:rPr sz="2000" b="0" i="0">
+                <a:solidFill>
+                  <a:srgbClr val="F7F2E7"/>
+                </a:solidFill>
+                <a:latin typeface="Aptos"/>
+              </a:rPr>
+              <a:t>1 / AGREE</a:t>
+            </a:r>
+          </a:p>
+          <a:p>
+            <a:pPr algn="l">
+              <a:lnSpc>
+                <a:spcPct val="105000"/>
+              </a:lnSpc>
+            </a:pPr>
+            <a:r>
+              <a:rPr sz="2000" b="0" i="0">
+                <a:solidFill>
+                  <a:srgbClr val="F7F2E7"/>
+                </a:solidFill>
+                <a:latin typeface="Aptos"/>
+              </a:rPr>
+              <a:t>Sponsor + Assets</a:t>
+            </a:r>
+          </a:p>
+          <a:p>
+            <a:pPr algn="l">
+              <a:lnSpc>
+                <a:spcPct val="105000"/>
+              </a:lnSpc>
+            </a:pPr>
+            <a:r>
+              <a:rPr sz="2000" b="0" i="0">
+                <a:solidFill>
+                  <a:srgbClr val="F7F2E7"/>
+                </a:solidFill>
+                <a:latin typeface="Aptos"/>
+              </a:rPr>
+              <a:t>Requirements</a:t>
+            </a:r>
+          </a:p>
+          <a:p>
+            <a:pPr algn="l">
+              <a:lnSpc>
+                <a:spcPct val="105000"/>
+              </a:lnSpc>
+            </a:pPr>
+            <a:r>
+              <a:rPr sz="2000" b="0" i="0">
+                <a:solidFill>
+                  <a:srgbClr val="F7F2E7"/>
+                </a:solidFill>
+                <a:latin typeface="Aptos"/>
+              </a:rPr>
+              <a:t>Control owners</a:t>
+            </a:r>
+          </a:p>
+          <a:p>
+            <a:pPr algn="l">
+              <a:lnSpc>
+                <a:spcPct val="105000"/>
+              </a:lnSpc>
+            </a:pPr>
+            <a:r>
+              <a:rPr sz="2000" b="0" i="0">
+                <a:solidFill>
+                  <a:srgbClr val="F7F2E7"/>
+                </a:solidFill>
+                <a:latin typeface="Aptos"/>
+              </a:rPr>
+              <a:t>Scope + authority</a:t>
+            </a:r>
+          </a:p>
+        </p:txBody>
+      </p:sp>
+      <p:sp>
+        <p:nvSpPr>
+          <p:cNvPr id="5" name="Rounded Rectangle 4"/>
+          <p:cNvSpPr/>
+          <p:nvPr/>
+        </p:nvSpPr>
+        <p:spPr>
+          <a:xfrm>
+            <a:off x="3429000" y="2606040"/>
+            <a:ext cx="2468880" cy="2834640"/>
+          </a:xfrm>
+          <a:prstGeom prst="roundRect">
+            <a:avLst/>
+          </a:prstGeom>
+          <a:solidFill>
+            <a:srgbClr val="D5E2D4"/>
+          </a:solidFill>
+          <a:ln>
+            <a:noFill/>
+          </a:ln>
+        </p:spPr>
+        <p:style>
+          <a:lnRef idx="1">
+            <a:schemeClr val="accent1"/>
+          </a:lnRef>
+          <a:fillRef idx="3">
+            <a:schemeClr val="accent1"/>
+          </a:fillRef>
+          <a:effectRef idx="0">
+            <a:schemeClr val="accent1"/>
+          </a:effectRef>
+          <a:fontRef idx="minor">
+            <a:schemeClr val="lt1"/>
+          </a:fontRef>
+        </p:style>
+        <p:txBody>
+          <a:bodyPr rtlCol="0" anchor="ctr" wrap="square" lIns="182880" rIns="182880" tIns="146304" bIns="146304">
+            <a:noAutofit/>
+          </a:bodyPr>
+          <a:lstStyle/>
+          <a:p>
+            <a:pPr algn="l">
+              <a:lnSpc>
+                <a:spcPct val="105000"/>
+              </a:lnSpc>
+            </a:pPr>
+            <a:r>
+              <a:rPr sz="2000" b="0" i="0">
+                <a:solidFill>
+                  <a:srgbClr val="183A31"/>
+                </a:solidFill>
+                <a:latin typeface="Aptos"/>
+              </a:rPr>
+              <a:t>2 / CONNECT</a:t>
+            </a:r>
+          </a:p>
+          <a:p>
+            <a:pPr algn="l">
+              <a:lnSpc>
+                <a:spcPct val="105000"/>
+              </a:lnSpc>
+            </a:pPr>
+            <a:r>
+              <a:rPr sz="2000" b="0" i="0">
+                <a:solidFill>
+                  <a:srgbClr val="183A31"/>
+                </a:solidFill>
+                <a:latin typeface="Aptos"/>
+              </a:rPr>
+              <a:t>Programme + Digital</a:t>
+            </a:r>
+          </a:p>
+          <a:p>
+            <a:pPr algn="l">
+              <a:lnSpc>
+                <a:spcPct val="105000"/>
+              </a:lnSpc>
+            </a:pPr>
+            <a:r>
+              <a:rPr sz="2000" b="0" i="0">
+                <a:solidFill>
+                  <a:srgbClr val="183A31"/>
+                </a:solidFill>
+                <a:latin typeface="Aptos"/>
+              </a:rPr>
+              <a:t>Same-home trace</a:t>
+            </a:r>
+          </a:p>
+          <a:p>
+            <a:pPr algn="l">
+              <a:lnSpc>
+                <a:spcPct val="105000"/>
+              </a:lnSpc>
+            </a:pPr>
+            <a:r>
+              <a:rPr sz="2000" b="0" i="0">
+                <a:solidFill>
+                  <a:srgbClr val="183A31"/>
+                </a:solidFill>
+                <a:latin typeface="Aptos"/>
+              </a:rPr>
+              <a:t>Real services</a:t>
+            </a:r>
+          </a:p>
+          <a:p>
+            <a:pPr algn="l">
+              <a:lnSpc>
+                <a:spcPct val="105000"/>
+              </a:lnSpc>
+            </a:pPr>
+            <a:r>
+              <a:rPr sz="2000" b="0" i="0">
+                <a:solidFill>
+                  <a:srgbClr val="183A31"/>
+                </a:solidFill>
+                <a:latin typeface="Aptos"/>
+              </a:rPr>
+              <a:t>Negative tests</a:t>
+            </a:r>
+          </a:p>
+        </p:txBody>
+      </p:sp>
+      <p:sp>
+        <p:nvSpPr>
+          <p:cNvPr id="6" name="Rounded Rectangle 5"/>
+          <p:cNvSpPr/>
+          <p:nvPr/>
+        </p:nvSpPr>
+        <p:spPr>
+          <a:xfrm>
+            <a:off x="6263640" y="2606040"/>
+            <a:ext cx="2468880" cy="2834640"/>
+          </a:xfrm>
+          <a:prstGeom prst="roundRect">
+            <a:avLst/>
+          </a:prstGeom>
+          <a:solidFill>
+            <a:srgbClr val="D5E2D4"/>
+          </a:solidFill>
+          <a:ln>
+            <a:noFill/>
+          </a:ln>
+        </p:spPr>
+        <p:style>
+          <a:lnRef idx="1">
+            <a:schemeClr val="accent1"/>
+          </a:lnRef>
+          <a:fillRef idx="3">
+            <a:schemeClr val="accent1"/>
+          </a:fillRef>
+          <a:effectRef idx="0">
+            <a:schemeClr val="accent1"/>
+          </a:effectRef>
+          <a:fontRef idx="minor">
+            <a:schemeClr val="lt1"/>
+          </a:fontRef>
+        </p:style>
+        <p:txBody>
+          <a:bodyPr rtlCol="0" anchor="ctr" wrap="square" lIns="182880" rIns="182880" tIns="146304" bIns="146304">
+            <a:noAutofit/>
+          </a:bodyPr>
+          <a:lstStyle/>
+          <a:p>
+            <a:pPr algn="l">
+              <a:lnSpc>
+                <a:spcPct val="105000"/>
+              </a:lnSpc>
+            </a:pPr>
+            <a:r>
+              <a:rPr sz="2000" b="0" i="0">
+                <a:solidFill>
+                  <a:srgbClr val="183A31"/>
+                </a:solidFill>
+                <a:latin typeface="Aptos"/>
+              </a:rPr>
+              <a:t>3 / PROVE</a:t>
+            </a:r>
+          </a:p>
+          <a:p>
+            <a:pPr algn="l">
+              <a:lnSpc>
+                <a:spcPct val="105000"/>
+              </a:lnSpc>
+            </a:pPr>
+            <a:r>
+              <a:rPr sz="2000" b="0" i="0">
+                <a:solidFill>
+                  <a:srgbClr val="183A31"/>
+                </a:solidFill>
+                <a:latin typeface="Aptos"/>
+              </a:rPr>
+              <a:t>Data + Finance + CIO</a:t>
+            </a:r>
+          </a:p>
+          <a:p>
+            <a:pPr algn="l">
+              <a:lnSpc>
+                <a:spcPct val="105000"/>
+              </a:lnSpc>
+            </a:pPr>
+            <a:r>
+              <a:rPr sz="2000" b="0" i="0">
+                <a:solidFill>
+                  <a:srgbClr val="183A31"/>
+                </a:solidFill>
+                <a:latin typeface="Aptos"/>
+              </a:rPr>
+              <a:t>Net value + cost</a:t>
+            </a:r>
+          </a:p>
+          <a:p>
+            <a:pPr algn="l">
+              <a:lnSpc>
+                <a:spcPct val="105000"/>
+              </a:lnSpc>
+            </a:pPr>
+            <a:r>
+              <a:rPr sz="2000" b="0" i="0">
+                <a:solidFill>
+                  <a:srgbClr val="183A31"/>
+                </a:solidFill>
+                <a:latin typeface="Aptos"/>
+              </a:rPr>
+              <a:t>Rights + recovery</a:t>
+            </a:r>
+          </a:p>
+        </p:txBody>
+      </p:sp>
+      <p:sp>
+        <p:nvSpPr>
+          <p:cNvPr id="7" name="Rounded Rectangle 6"/>
+          <p:cNvSpPr/>
+          <p:nvPr/>
+        </p:nvSpPr>
+        <p:spPr>
+          <a:xfrm>
+            <a:off x="9098280" y="2606040"/>
+            <a:ext cx="2468880" cy="2834640"/>
+          </a:xfrm>
+          <a:prstGeom prst="roundRect">
+            <a:avLst/>
+          </a:prstGeom>
+          <a:solidFill>
+            <a:srgbClr val="E5B96A"/>
+          </a:solidFill>
+          <a:ln>
+            <a:noFill/>
+          </a:ln>
+        </p:spPr>
+        <p:style>
+          <a:lnRef idx="1">
+            <a:schemeClr val="accent1"/>
+          </a:lnRef>
+          <a:fillRef idx="3">
+            <a:schemeClr val="accent1"/>
+          </a:fillRef>
+          <a:effectRef idx="0">
+            <a:schemeClr val="accent1"/>
+          </a:effectRef>
+          <a:fontRef idx="minor">
+            <a:schemeClr val="lt1"/>
+          </a:fontRef>
+        </p:style>
+        <p:txBody>
+          <a:bodyPr rtlCol="0" anchor="ctr" wrap="square" lIns="182880" rIns="182880" tIns="146304" bIns="146304">
+            <a:noAutofit/>
+          </a:bodyPr>
+          <a:lstStyle/>
+          <a:p>
+            <a:pPr algn="l">
+              <a:lnSpc>
+                <a:spcPct val="105000"/>
+              </a:lnSpc>
+            </a:pPr>
+            <a:r>
+              <a:rPr sz="2000" b="0" i="0">
+                <a:solidFill>
+                  <a:srgbClr val="183A31"/>
+                </a:solidFill>
+                <a:latin typeface="Aptos"/>
+              </a:rPr>
+              <a:t>4 / DECIDE</a:t>
+            </a:r>
+          </a:p>
+          <a:p>
+            <a:pPr algn="l">
+              <a:lnSpc>
+                <a:spcPct val="105000"/>
+              </a:lnSpc>
+            </a:pPr>
+            <a:r>
+              <a:rPr sz="2000" b="0" i="0">
+                <a:solidFill>
+                  <a:srgbClr val="183A31"/>
+                </a:solidFill>
+                <a:latin typeface="Aptos"/>
+              </a:rPr>
+              <a:t>Sponsor + owners</a:t>
+            </a:r>
+          </a:p>
+          <a:p>
+            <a:pPr algn="l">
+              <a:lnSpc>
+                <a:spcPct val="105000"/>
+              </a:lnSpc>
+            </a:pPr>
+            <a:r>
+              <a:rPr sz="2000" b="0" i="0">
+                <a:solidFill>
+                  <a:srgbClr val="183A31"/>
+                </a:solidFill>
+                <a:latin typeface="Aptos"/>
+              </a:rPr>
+              <a:t>Evidence-led return</a:t>
+            </a:r>
+          </a:p>
+          <a:p>
+            <a:pPr algn="l">
+              <a:lnSpc>
+                <a:spcPct val="105000"/>
+              </a:lnSpc>
+            </a:pPr>
+            <a:r>
+              <a:rPr sz="2000" b="0" i="0">
+                <a:solidFill>
+                  <a:srgbClr val="183A31"/>
+                </a:solidFill>
+                <a:latin typeface="Aptos"/>
+              </a:rPr>
+              <a:t>Continue,</a:t>
+            </a:r>
+          </a:p>
+          <a:p>
+            <a:pPr algn="l">
+              <a:lnSpc>
+                <a:spcPct val="105000"/>
+              </a:lnSpc>
+            </a:pPr>
+            <a:r>
+              <a:rPr sz="2000" b="0" i="0">
+                <a:solidFill>
+                  <a:srgbClr val="183A31"/>
+                </a:solidFill>
+                <a:latin typeface="Aptos"/>
+              </a:rPr>
+              <a:t>simplify or stop</a:t>
+            </a:r>
+          </a:p>
+        </p:txBody>
+      </p:sp>
+      <p:sp>
+        <p:nvSpPr>
+          <p:cNvPr id="8" name="TextBox 7"/>
+          <p:cNvSpPr txBox="1"/>
+          <p:nvPr/>
+        </p:nvSpPr>
+        <p:spPr>
+          <a:xfrm>
+            <a:off x="594360" y="6126480"/>
+            <a:ext cx="10972800" cy="256032"/>
+          </a:xfrm>
+          <a:prstGeom prst="rect">
+            <a:avLst/>
+          </a:prstGeom>
+          <a:noFill/>
+        </p:spPr>
+        <p:txBody>
+          <a:bodyPr wrap="square" lIns="0" rIns="0" tIns="0" bIns="0">
+            <a:spAutoFit/>
+          </a:bodyPr>
+          <a:lstStyle/>
+          <a:p>
+            <a:r>
+              <a:rPr sz="1100" b="0" i="0">
+                <a:solidFill>
+                  <a:srgbClr val="183A31"/>
+                </a:solidFill>
+                <a:latin typeface="Aptos"/>
+              </a:rPr>
+              <a:t>17 / PROPOSED GATES / E06–E10 / NO NEW SPEND, DEPLOYMENT OR LIVE PILOT AUTHORITY</a:t>
+            </a:r>
+          </a:p>
+        </p:txBody>
+      </p:sp>
+      <p:sp>
+        <p:nvSpPr>
+          <p:cNvPr id="9" name="Zava logo contrast backing"/>
+          <p:cNvSpPr/>
+          <p:nvPr/>
+        </p:nvSpPr>
+        <p:spPr>
+          <a:xfrm>
+            <a:off x="11231575" y="91440"/>
+            <a:ext cx="777240" cy="271551"/>
+          </a:xfrm>
+          <a:prstGeom prst="rect">
+            <a:avLst/>
+          </a:prstGeom>
+          <a:solidFill>
+            <a:srgbClr val="FFFFFF"/>
+          </a:solidFill>
+          <a:ln>
+            <a:noFill/>
+          </a:ln>
+        </p:spPr>
+        <p:style>
+          <a:lnRef idx="1">
+            <a:schemeClr val="accent1"/>
+          </a:lnRef>
+          <a:fillRef idx="3">
+            <a:schemeClr val="accent1"/>
+          </a:fillRef>
+          <a:effectRef idx="2">
+            <a:schemeClr val="accent1"/>
+          </a:effectRef>
+          <a:fontRef idx="minor">
+            <a:schemeClr val="lt1"/>
+          </a:fontRef>
+        </p:style>
+        <p:txBody>
+          <a:bodyPr rtlCol="0" anchor="ctr"/>
+          <a:lstStyle/>
+          <a:p>
+            <a:pPr algn="ctr"/>
+          </a:p>
+        </p:txBody>
+      </p:sp>
+      <p:pic>
+        <p:nvPicPr>
+          <p:cNvPr id="10" name="Zava branding logo" descr="image.png"/>
+          <p:cNvPicPr>
+            <a:picLocks noChangeAspect="1"/>
+          </p:cNvPicPr>
+          <p:nvPr/>
+        </p:nvPicPr>
+        <p:blipFill>
+          <a:blip r:embed="rId3"/>
+          <a:stretch>
+            <a:fillRect/>
+          </a:stretch>
+        </p:blipFill>
+        <p:spPr>
+          <a:xfrm>
+            <a:off x="11231575" y="91440"/>
+            <a:ext cx="777240" cy="271551"/>
+          </a:xfrm>
+          <a:prstGeom prst="rect">
+            <a:avLst/>
+          </a:prstGeom>
+        </p:spPr>
+      </p:pic>
+    </p:spTree>
+  </p:cSld>
+  <p:clrMapOvr>
+    <a:masterClrMapping/>
+  </p:clrMapOvr>
+</p:sld>
+</file>
+
+<file path=ppt/slides/slide18.xml><?xml version="1.0" encoding="utf-8"?>
 <p:sld xmlns:a="http://schemas.openxmlformats.org/drawingml/2006/main" xmlns:p="http://schemas.openxmlformats.org/presentationml/2006/main" xmlns:r="http://schemas.openxmlformats.org/officeDocument/2006/relationships">
   <p:cSld>
     <p:bg>
@@ -11058,7 +11358,7 @@
                 </a:solidFill>
                 <a:latin typeface="Aptos"/>
               </a:rPr>
-              <a:t>17 / ENDORSE PLANNING ONLY / NO PROCUREMENT, PRODUCTION OR SPENDING AUTHORITY / E07/E08</a:t>
+              <a:t>18 / ENDORSE PLANNING ONLY / NO PROCUREMENT, PRODUCTION OR SPENDING AUTHORITY / E07/E08</a:t>
             </a:r>
           </a:p>
         </p:txBody>
@@ -11109,567 +11409,6 @@
       <p:pic>
         <p:nvPicPr>
           <p:cNvPr id="10" name="Zava branding logo" descr="image.png"/>
-          <p:cNvPicPr>
-            <a:picLocks noChangeAspect="1"/>
-          </p:cNvPicPr>
-          <p:nvPr/>
-        </p:nvPicPr>
-        <p:blipFill>
-          <a:blip r:embed="rId3"/>
-          <a:stretch>
-            <a:fillRect/>
-          </a:stretch>
-        </p:blipFill>
-        <p:spPr>
-          <a:xfrm>
-            <a:off x="11231575" y="91440"/>
-            <a:ext cx="777240" cy="271551"/>
-          </a:xfrm>
-          <a:prstGeom prst="rect">
-            <a:avLst/>
-          </a:prstGeom>
-        </p:spPr>
-      </p:pic>
-    </p:spTree>
-  </p:cSld>
-  <p:clrMapOvr>
-    <a:masterClrMapping/>
-  </p:clrMapOvr>
-</p:sld>
-</file>
-
-<file path=ppt/slides/slide18.xml><?xml version="1.0" encoding="utf-8"?>
-<p:sld xmlns:a="http://schemas.openxmlformats.org/drawingml/2006/main" xmlns:p="http://schemas.openxmlformats.org/presentationml/2006/main" xmlns:r="http://schemas.openxmlformats.org/officeDocument/2006/relationships">
-  <p:cSld>
-    <p:bg>
-      <p:bgPr>
-        <a:solidFill>
-          <a:srgbClr val="F7F2E7"/>
-        </a:solidFill>
-        <a:effectLst/>
-      </p:bgPr>
-    </p:bg>
-    <p:spTree>
-      <p:nvGrpSpPr>
-        <p:cNvPr id="1" name=""/>
-        <p:cNvGrpSpPr/>
-        <p:nvPr/>
-      </p:nvGrpSpPr>
-      <p:grpSpPr/>
-      <p:sp>
-        <p:nvSpPr>
-          <p:cNvPr id="2" name="TextBox 1"/>
-          <p:cNvSpPr txBox="1"/>
-          <p:nvPr/>
-        </p:nvSpPr>
-        <p:spPr>
-          <a:xfrm>
-            <a:off x="594360" y="548640"/>
-            <a:ext cx="10972800" cy="274320"/>
-          </a:xfrm>
-          <a:prstGeom prst="rect">
-            <a:avLst/>
-          </a:prstGeom>
-          <a:noFill/>
-        </p:spPr>
-        <p:txBody>
-          <a:bodyPr wrap="square" lIns="0" rIns="0" tIns="0" bIns="0">
-            <a:spAutoFit/>
-          </a:bodyPr>
-          <a:lstStyle/>
-          <a:p>
-            <a:r>
-              <a:rPr sz="1100" b="1" i="0">
-                <a:solidFill>
-                  <a:srgbClr val="446056"/>
-                </a:solidFill>
-                <a:latin typeface="Aptos"/>
-              </a:rPr>
-              <a:t>APPENDIX A • TARGET DESIGN, NOT DEPLOYMENT CLAIM</a:t>
-            </a:r>
-          </a:p>
-        </p:txBody>
-      </p:sp>
-      <p:sp>
-        <p:nvSpPr>
-          <p:cNvPr id="3" name="TextBox 2"/>
-          <p:cNvSpPr txBox="1"/>
-          <p:nvPr/>
-        </p:nvSpPr>
-        <p:spPr>
-          <a:xfrm>
-            <a:off x="594360" y="1115568"/>
-            <a:ext cx="10972800" cy="1143000"/>
-          </a:xfrm>
-          <a:prstGeom prst="rect">
-            <a:avLst/>
-          </a:prstGeom>
-          <a:noFill/>
-        </p:spPr>
-        <p:txBody>
-          <a:bodyPr wrap="square" lIns="0" rIns="0" tIns="0" bIns="0">
-            <a:spAutoFit/>
-          </a:bodyPr>
-          <a:lstStyle/>
-          <a:p>
-            <a:r>
-              <a:rPr sz="3800" b="1" i="0">
-                <a:solidFill>
-                  <a:srgbClr val="183A31"/>
-                </a:solidFill>
-                <a:latin typeface="Aptos Display"/>
-              </a:rPr>
-              <a:t>Technical Q&amp;A: isolate failure, preserve control</a:t>
-            </a:r>
-          </a:p>
-        </p:txBody>
-      </p:sp>
-      <p:sp>
-        <p:nvSpPr>
-          <p:cNvPr id="4" name="TextBox 3"/>
-          <p:cNvSpPr txBox="1"/>
-          <p:nvPr/>
-        </p:nvSpPr>
-        <p:spPr>
-          <a:xfrm>
-            <a:off x="594360" y="6126480"/>
-            <a:ext cx="10972800" cy="256032"/>
-          </a:xfrm>
-          <a:prstGeom prst="rect">
-            <a:avLst/>
-          </a:prstGeom>
-          <a:noFill/>
-        </p:spPr>
-        <p:txBody>
-          <a:bodyPr wrap="square" lIns="0" rIns="0" tIns="0" bIns="0">
-            <a:spAutoFit/>
-          </a:bodyPr>
-          <a:lstStyle/>
-          <a:p>
-            <a:r>
-              <a:rPr sz="1100" b="0" i="0">
-                <a:solidFill>
-                  <a:srgbClr val="183A31"/>
-                </a:solidFill>
-                <a:latin typeface="Aptos"/>
-              </a:rPr>
-              <a:t>18  /  ZAVA FORWARD     •     PROPOSED PATTERNS + OPEN ASSURANCE • E08/E09/E10/E11</a:t>
-            </a:r>
-          </a:p>
-        </p:txBody>
-      </p:sp>
-      <p:sp>
-        <p:nvSpPr>
-          <p:cNvPr id="5" name="Rounded Rectangle 4"/>
-          <p:cNvSpPr/>
-          <p:nvPr/>
-        </p:nvSpPr>
-        <p:spPr>
-          <a:xfrm>
-            <a:off x="594360" y="2606040"/>
-            <a:ext cx="3465576" cy="2834640"/>
-          </a:xfrm>
-          <a:prstGeom prst="roundRect">
-            <a:avLst/>
-          </a:prstGeom>
-          <a:solidFill>
-            <a:srgbClr val="173F35"/>
-          </a:solidFill>
-          <a:ln>
-            <a:noFill/>
-          </a:ln>
-        </p:spPr>
-        <p:style>
-          <a:lnRef idx="1">
-            <a:schemeClr val="accent1"/>
-          </a:lnRef>
-          <a:fillRef idx="3">
-            <a:schemeClr val="accent1"/>
-          </a:fillRef>
-          <a:effectRef idx="0">
-            <a:schemeClr val="accent1"/>
-          </a:effectRef>
-          <a:fontRef idx="minor">
-            <a:schemeClr val="lt1"/>
-          </a:fontRef>
-        </p:style>
-        <p:txBody>
-          <a:bodyPr rtlCol="0" anchor="ctr" wrap="square" lIns="201168" rIns="201168" tIns="128016" bIns="128016">
-            <a:noAutofit/>
-          </a:bodyPr>
-          <a:lstStyle/>
-          <a:p>
-            <a:pPr algn="l">
-              <a:lnSpc>
-                <a:spcPct val="105000"/>
-              </a:lnSpc>
-            </a:pPr>
-            <a:r>
-              <a:rPr sz="2000" b="0" i="0">
-                <a:solidFill>
-                  <a:srgbClr val="F7F2E7"/>
-                </a:solidFill>
-                <a:latin typeface="Aptos"/>
-              </a:rPr>
-              <a:t>STATE &amp; SCALE</a:t>
-            </a:r>
-          </a:p>
-          <a:p>
-            <a:pPr algn="l">
-              <a:lnSpc>
-                <a:spcPct val="105000"/>
-              </a:lnSpc>
-            </a:pPr>
-            <a:r>
-              <a:rPr sz="2000" b="0" i="0">
-                <a:solidFill>
-                  <a:srgbClr val="F7F2E7"/>
-                </a:solidFill>
-                <a:latin typeface="Aptos"/>
-              </a:rPr>
-              <a:t>SQL row versions / idempotency</a:t>
-            </a:r>
-          </a:p>
-          <a:p>
-            <a:pPr algn="l">
-              <a:lnSpc>
-                <a:spcPct val="105000"/>
-              </a:lnSpc>
-            </a:pPr>
-            <a:r>
-              <a:rPr sz="2000" b="0" i="0">
-                <a:solidFill>
-                  <a:srgbClr val="F7F2E7"/>
-                </a:solidFill>
-                <a:latin typeface="Aptos"/>
-              </a:rPr>
-              <a:t>Indexed queries / paging</a:t>
-            </a:r>
-          </a:p>
-          <a:p>
-            <a:pPr algn="l">
-              <a:lnSpc>
-                <a:spcPct val="105000"/>
-              </a:lnSpc>
-            </a:pPr>
-            <a:r>
-              <a:rPr sz="2000" b="0" i="0">
-                <a:solidFill>
-                  <a:srgbClr val="F7F2E7"/>
-                </a:solidFill>
-                <a:latin typeface="Aptos"/>
-              </a:rPr>
-              <a:t>Blob evidence versions</a:t>
-            </a:r>
-          </a:p>
-          <a:p>
-            <a:pPr algn="l">
-              <a:lnSpc>
-                <a:spcPct val="105000"/>
-              </a:lnSpc>
-            </a:pPr>
-            <a:r>
-              <a:rPr sz="2000" b="0" i="0">
-                <a:solidFill>
-                  <a:srgbClr val="F7F2E7"/>
-                </a:solidFill>
-                <a:latin typeface="Aptos"/>
-              </a:rPr>
-              <a:t>Restart and restore tests</a:t>
-            </a:r>
-          </a:p>
-        </p:txBody>
-      </p:sp>
-      <p:sp>
-        <p:nvSpPr>
-          <p:cNvPr id="6" name="Rounded Rectangle 5"/>
-          <p:cNvSpPr/>
-          <p:nvPr/>
-        </p:nvSpPr>
-        <p:spPr>
-          <a:xfrm>
-            <a:off x="4361688" y="2606040"/>
-            <a:ext cx="3465576" cy="2834640"/>
-          </a:xfrm>
-          <a:prstGeom prst="roundRect">
-            <a:avLst/>
-          </a:prstGeom>
-          <a:solidFill>
-            <a:srgbClr val="D5E2D4"/>
-          </a:solidFill>
-          <a:ln>
-            <a:noFill/>
-          </a:ln>
-        </p:spPr>
-        <p:style>
-          <a:lnRef idx="1">
-            <a:schemeClr val="accent1"/>
-          </a:lnRef>
-          <a:fillRef idx="3">
-            <a:schemeClr val="accent1"/>
-          </a:fillRef>
-          <a:effectRef idx="0">
-            <a:schemeClr val="accent1"/>
-          </a:effectRef>
-          <a:fontRef idx="minor">
-            <a:schemeClr val="lt1"/>
-          </a:fontRef>
-        </p:style>
-        <p:txBody>
-          <a:bodyPr rtlCol="0" anchor="ctr" wrap="square" lIns="201168" rIns="201168" tIns="128016" bIns="128016">
-            <a:noAutofit/>
-          </a:bodyPr>
-          <a:lstStyle/>
-          <a:p>
-            <a:pPr algn="l">
-              <a:lnSpc>
-                <a:spcPct val="105000"/>
-              </a:lnSpc>
-            </a:pPr>
-            <a:r>
-              <a:rPr sz="2000" b="0" i="0">
-                <a:solidFill>
-                  <a:srgbClr val="183A31"/>
-                </a:solidFill>
-                <a:latin typeface="Aptos"/>
-              </a:rPr>
-              <a:t>TRUST BOUNDARIES</a:t>
-            </a:r>
-          </a:p>
-          <a:p>
-            <a:pPr algn="l">
-              <a:lnSpc>
-                <a:spcPct val="105000"/>
-              </a:lnSpc>
-            </a:pPr>
-            <a:r>
-              <a:rPr sz="2000" b="0" i="0">
-                <a:solidFill>
-                  <a:srgbClr val="183A31"/>
-                </a:solidFill>
-                <a:latin typeface="Aptos"/>
-              </a:rPr>
-              <a:t>Role / case / field rights</a:t>
-            </a:r>
-          </a:p>
-          <a:p>
-            <a:pPr algn="l">
-              <a:lnSpc>
-                <a:spcPct val="105000"/>
-              </a:lnSpc>
-            </a:pPr>
-            <a:r>
-              <a:rPr sz="2000" b="0" i="0">
-                <a:solidFill>
-                  <a:srgbClr val="183A31"/>
-                </a:solidFill>
-                <a:latin typeface="Aptos"/>
-              </a:rPr>
-              <a:t>Permitted model inputs</a:t>
-            </a:r>
-          </a:p>
-          <a:p>
-            <a:pPr algn="l">
-              <a:lnSpc>
-                <a:spcPct val="105000"/>
-              </a:lnSpc>
-            </a:pPr>
-            <a:r>
-              <a:rPr sz="2000" b="0" i="0">
-                <a:solidFill>
-                  <a:srgbClr val="183A31"/>
-                </a:solidFill>
-                <a:latin typeface="Aptos"/>
-              </a:rPr>
-              <a:t>Schema / source validation</a:t>
-            </a:r>
-          </a:p>
-          <a:p>
-            <a:pPr algn="l">
-              <a:lnSpc>
-                <a:spcPct val="105000"/>
-              </a:lnSpc>
-            </a:pPr>
-            <a:r>
-              <a:rPr sz="2000" b="0" i="0">
-                <a:solidFill>
-                  <a:srgbClr val="183A31"/>
-                </a:solidFill>
-                <a:latin typeface="Aptos"/>
-              </a:rPr>
-              <a:t>No agent decision writes</a:t>
-            </a:r>
-          </a:p>
-        </p:txBody>
-      </p:sp>
-      <p:sp>
-        <p:nvSpPr>
-          <p:cNvPr id="7" name="Rounded Rectangle 6"/>
-          <p:cNvSpPr/>
-          <p:nvPr/>
-        </p:nvSpPr>
-        <p:spPr>
-          <a:xfrm>
-            <a:off x="8129016" y="2606040"/>
-            <a:ext cx="3465576" cy="2834640"/>
-          </a:xfrm>
-          <a:prstGeom prst="roundRect">
-            <a:avLst/>
-          </a:prstGeom>
-          <a:solidFill>
-            <a:srgbClr val="173F35"/>
-          </a:solidFill>
-          <a:ln>
-            <a:noFill/>
-          </a:ln>
-        </p:spPr>
-        <p:style>
-          <a:lnRef idx="1">
-            <a:schemeClr val="accent1"/>
-          </a:lnRef>
-          <a:fillRef idx="3">
-            <a:schemeClr val="accent1"/>
-          </a:fillRef>
-          <a:effectRef idx="0">
-            <a:schemeClr val="accent1"/>
-          </a:effectRef>
-          <a:fontRef idx="minor">
-            <a:schemeClr val="lt1"/>
-          </a:fontRef>
-        </p:style>
-        <p:txBody>
-          <a:bodyPr rtlCol="0" anchor="ctr" wrap="square" lIns="201168" rIns="201168" tIns="128016" bIns="128016">
-            <a:noAutofit/>
-          </a:bodyPr>
-          <a:lstStyle/>
-          <a:p>
-            <a:pPr algn="l">
-              <a:lnSpc>
-                <a:spcPct val="105000"/>
-              </a:lnSpc>
-            </a:pPr>
-            <a:r>
-              <a:rPr sz="2000" b="0" i="0">
-                <a:solidFill>
-                  <a:srgbClr val="F7F2E7"/>
-                </a:solidFill>
-                <a:latin typeface="Aptos"/>
-              </a:rPr>
-              <a:t>FAILURE &amp; OPERATIONS</a:t>
-            </a:r>
-          </a:p>
-          <a:p>
-            <a:pPr algn="l">
-              <a:lnSpc>
-                <a:spcPct val="105000"/>
-              </a:lnSpc>
-            </a:pPr>
-            <a:r>
-              <a:rPr sz="2000" b="0" i="0">
-                <a:solidFill>
-                  <a:srgbClr val="F7F2E7"/>
-                </a:solidFill>
-                <a:latin typeface="Aptos"/>
-              </a:rPr>
-              <a:t>Manual route on AI failure</a:t>
-            </a:r>
-          </a:p>
-          <a:p>
-            <a:pPr algn="l">
-              <a:lnSpc>
-                <a:spcPct val="105000"/>
-              </a:lnSpc>
-            </a:pPr>
-            <a:r>
-              <a:rPr sz="2000" b="0" i="0">
-                <a:solidFill>
-                  <a:srgbClr val="F7F2E7"/>
-                </a:solidFill>
-                <a:latin typeface="Aptos"/>
-              </a:rPr>
-              <a:t>Unknown facts hold reviews</a:t>
-            </a:r>
-          </a:p>
-          <a:p>
-            <a:pPr algn="l">
-              <a:lnSpc>
-                <a:spcPct val="105000"/>
-              </a:lnSpc>
-            </a:pPr>
-            <a:r>
-              <a:rPr sz="2000" b="0" i="0">
-                <a:solidFill>
-                  <a:srgbClr val="F7F2E7"/>
-                </a:solidFill>
-                <a:latin typeface="Aptos"/>
-              </a:rPr>
-              <a:t>Audit / cost telemetry</a:t>
-            </a:r>
-          </a:p>
-          <a:p>
-            <a:pPr algn="l">
-              <a:lnSpc>
-                <a:spcPct val="105000"/>
-              </a:lnSpc>
-            </a:pPr>
-            <a:r>
-              <a:rPr sz="2000" b="0" i="0">
-                <a:solidFill>
-                  <a:srgbClr val="F7F2E7"/>
-                </a:solidFill>
-                <a:latin typeface="Aptos"/>
-              </a:rPr>
-              <a:t>Recovery still to prove</a:t>
-            </a:r>
-          </a:p>
-        </p:txBody>
-      </p:sp>
-      <p:sp>
-        <p:nvSpPr>
-          <p:cNvPr id="8" name="Zava logo contrast backing"/>
-          <p:cNvSpPr/>
-          <p:nvPr/>
-        </p:nvSpPr>
-        <p:spPr>
-          <a:xfrm>
-            <a:off x="11231575" y="91440"/>
-            <a:ext cx="777240" cy="271551"/>
-          </a:xfrm>
-          <a:prstGeom prst="rect">
-            <a:avLst/>
-          </a:prstGeom>
-          <a:solidFill>
-            <a:srgbClr val="FFFFFF"/>
-          </a:solidFill>
-          <a:ln>
-            <a:noFill/>
-          </a:ln>
-        </p:spPr>
-        <p:style>
-          <a:lnRef idx="1">
-            <a:schemeClr val="accent1"/>
-          </a:lnRef>
-          <a:fillRef idx="3">
-            <a:schemeClr val="accent1"/>
-          </a:fillRef>
-          <a:effectRef idx="2">
-            <a:schemeClr val="accent1"/>
-          </a:effectRef>
-          <a:fontRef idx="minor">
-            <a:schemeClr val="lt1"/>
-          </a:fontRef>
-        </p:style>
-        <p:txBody>
-          <a:bodyPr rtlCol="0" anchor="ctr"/>
-          <a:lstStyle/>
-          <a:p>
-            <a:pPr algn="ctr"/>
-          </a:p>
-        </p:txBody>
-      </p:sp>
-      <p:pic>
-        <p:nvPicPr>
-          <p:cNvPr id="9" name="Zava branding logo" descr="image.png"/>
           <p:cNvPicPr>
             <a:picLocks noChangeAspect="1"/>
           </p:cNvPicPr>
@@ -11746,7 +11485,7 @@
                 </a:solidFill>
                 <a:latin typeface="Aptos"/>
               </a:rPr>
-              <a:t>APPENDIX B • ANSWERS WITH REVERSAL CONDITIONS</a:t>
+              <a:t>APPENDIX A • TARGET DESIGN, NOT DEPLOYMENT CLAIM</a:t>
             </a:r>
           </a:p>
         </p:txBody>
@@ -11780,7 +11519,7 @@
                 </a:solidFill>
                 <a:latin typeface="Aptos Display"/>
               </a:rPr>
-              <a:t>Council Q&amp;A: the objections we welcome</a:t>
+              <a:t>Technical Q&amp;A: isolate failure, preserve control</a:t>
             </a:r>
           </a:p>
         </p:txBody>
@@ -11814,7 +11553,7 @@
                 </a:solidFill>
                 <a:latin typeface="Aptos"/>
               </a:rPr>
-              <a:t>19  /  ZAVA FORWARD     •     ALTERNATIVES, AFFORDABILITY, AUTHORITY • E05/E07/E09/E11</a:t>
+              <a:t>19  /  ZAVA FORWARD     •     PROPOSED PATTERNS + OPEN ASSURANCE • E08/E09/E10/E11</a:t>
             </a:r>
           </a:p>
         </p:txBody>
@@ -11828,7 +11567,7 @@
         <p:spPr>
           <a:xfrm>
             <a:off x="594360" y="2606040"/>
-            <a:ext cx="5349240" cy="1234440"/>
+            <a:ext cx="3465576" cy="2834640"/>
           </a:xfrm>
           <a:prstGeom prst="roundRect">
             <a:avLst/>
@@ -11872,7 +11611,7 @@
                 </a:solidFill>
                 <a:latin typeface="Aptos"/>
               </a:rPr>
-              <a:t>WHY NOT EXCEL / M365?</a:t>
+              <a:t>STATE &amp; SCALE</a:t>
             </a:r>
           </a:p>
           <a:p>
@@ -11888,7 +11627,55 @@
                 </a:solidFill>
                 <a:latin typeface="Aptos"/>
               </a:rPr>
-              <a:t>Cost equivalent options; control mechanisms must win.</a:t>
+              <a:t>SQL row versions / idempotency</a:t>
+            </a:r>
+          </a:p>
+          <a:p>
+            <a:pPr algn="l">
+              <a:lnSpc>
+                <a:spcPct val="105000"/>
+              </a:lnSpc>
+            </a:pPr>
+            <a:r>
+              <a:rPr sz="2000" b="0" i="0">
+                <a:solidFill>
+                  <a:srgbClr val="F7F2E7"/>
+                </a:solidFill>
+                <a:latin typeface="Aptos"/>
+              </a:rPr>
+              <a:t>Indexed queries / paging</a:t>
+            </a:r>
+          </a:p>
+          <a:p>
+            <a:pPr algn="l">
+              <a:lnSpc>
+                <a:spcPct val="105000"/>
+              </a:lnSpc>
+            </a:pPr>
+            <a:r>
+              <a:rPr sz="2000" b="0" i="0">
+                <a:solidFill>
+                  <a:srgbClr val="F7F2E7"/>
+                </a:solidFill>
+                <a:latin typeface="Aptos"/>
+              </a:rPr>
+              <a:t>Blob evidence versions</a:t>
+            </a:r>
+          </a:p>
+          <a:p>
+            <a:pPr algn="l">
+              <a:lnSpc>
+                <a:spcPct val="105000"/>
+              </a:lnSpc>
+            </a:pPr>
+            <a:r>
+              <a:rPr sz="2000" b="0" i="0">
+                <a:solidFill>
+                  <a:srgbClr val="F7F2E7"/>
+                </a:solidFill>
+                <a:latin typeface="Aptos"/>
+              </a:rPr>
+              <a:t>Restart and restore tests</a:t>
             </a:r>
           </a:p>
         </p:txBody>
@@ -11901,8 +11688,8 @@
         </p:nvSpPr>
         <p:spPr>
           <a:xfrm>
-            <a:off x="6263640" y="2606040"/>
-            <a:ext cx="5303520" cy="1234440"/>
+            <a:off x="4361688" y="2606040"/>
+            <a:ext cx="3465576" cy="2834640"/>
           </a:xfrm>
           <a:prstGeom prst="roundRect">
             <a:avLst/>
@@ -11946,7 +11733,7 @@
                 </a:solidFill>
                 <a:latin typeface="Aptos"/>
               </a:rPr>
-              <a:t>WHY NOT LAUNCH NOW?</a:t>
+              <a:t>TRUST BOUNDARIES</a:t>
             </a:r>
           </a:p>
           <a:p>
@@ -11962,7 +11749,55 @@
                 </a:solidFill>
                 <a:latin typeface="Aptos"/>
               </a:rPr>
-              <a:t>Feasibility is not full workflow or human acceptance.</a:t>
+              <a:t>Role / case / field rights</a:t>
+            </a:r>
+          </a:p>
+          <a:p>
+            <a:pPr algn="l">
+              <a:lnSpc>
+                <a:spcPct val="105000"/>
+              </a:lnSpc>
+            </a:pPr>
+            <a:r>
+              <a:rPr sz="2000" b="0" i="0">
+                <a:solidFill>
+                  <a:srgbClr val="183A31"/>
+                </a:solidFill>
+                <a:latin typeface="Aptos"/>
+              </a:rPr>
+              <a:t>Permitted model inputs</a:t>
+            </a:r>
+          </a:p>
+          <a:p>
+            <a:pPr algn="l">
+              <a:lnSpc>
+                <a:spcPct val="105000"/>
+              </a:lnSpc>
+            </a:pPr>
+            <a:r>
+              <a:rPr sz="2000" b="0" i="0">
+                <a:solidFill>
+                  <a:srgbClr val="183A31"/>
+                </a:solidFill>
+                <a:latin typeface="Aptos"/>
+              </a:rPr>
+              <a:t>Schema / source validation</a:t>
+            </a:r>
+          </a:p>
+          <a:p>
+            <a:pPr algn="l">
+              <a:lnSpc>
+                <a:spcPct val="105000"/>
+              </a:lnSpc>
+            </a:pPr>
+            <a:r>
+              <a:rPr sz="2000" b="0" i="0">
+                <a:solidFill>
+                  <a:srgbClr val="183A31"/>
+                </a:solidFill>
+                <a:latin typeface="Aptos"/>
+              </a:rPr>
+              <a:t>No agent decision writes</a:t>
             </a:r>
           </a:p>
         </p:txBody>
@@ -11975,82 +11810,8 @@
         </p:nvSpPr>
         <p:spPr>
           <a:xfrm>
-            <a:off x="594360" y="4206240"/>
-            <a:ext cx="5349240" cy="1234440"/>
-          </a:xfrm>
-          <a:prstGeom prst="roundRect">
-            <a:avLst/>
-          </a:prstGeom>
-          <a:solidFill>
-            <a:srgbClr val="D5E2D4"/>
-          </a:solidFill>
-          <a:ln>
-            <a:noFill/>
-          </a:ln>
-        </p:spPr>
-        <p:style>
-          <a:lnRef idx="1">
-            <a:schemeClr val="accent1"/>
-          </a:lnRef>
-          <a:fillRef idx="3">
-            <a:schemeClr val="accent1"/>
-          </a:fillRef>
-          <a:effectRef idx="0">
-            <a:schemeClr val="accent1"/>
-          </a:effectRef>
-          <a:fontRef idx="minor">
-            <a:schemeClr val="lt1"/>
-          </a:fontRef>
-        </p:style>
-        <p:txBody>
-          <a:bodyPr rtlCol="0" anchor="ctr" wrap="square" lIns="201168" rIns="201168" tIns="128016" bIns="128016">
-            <a:noAutofit/>
-          </a:bodyPr>
-          <a:lstStyle/>
-          <a:p>
-            <a:pPr algn="l">
-              <a:lnSpc>
-                <a:spcPct val="105000"/>
-              </a:lnSpc>
-            </a:pPr>
-            <a:r>
-              <a:rPr sz="2000" b="0" i="0">
-                <a:solidFill>
-                  <a:srgbClr val="183A31"/>
-                </a:solidFill>
-                <a:latin typeface="Aptos"/>
-              </a:rPr>
-              <a:t>WHAT BUDGET?</a:t>
-            </a:r>
-          </a:p>
-          <a:p>
-            <a:pPr algn="l">
-              <a:lnSpc>
-                <a:spcPct val="105000"/>
-              </a:lnSpc>
-            </a:pPr>
-            <a:r>
-              <a:rPr sz="2000" b="0" i="0">
-                <a:solidFill>
-                  <a:srgbClr val="183A31"/>
-                </a:solidFill>
-                <a:latin typeface="Aptos"/>
-              </a:rPr>
-              <a:t>New scoped authority needed; prior cap/override is historical.</a:t>
-            </a:r>
-          </a:p>
-        </p:txBody>
-      </p:sp>
-      <p:sp>
-        <p:nvSpPr>
-          <p:cNvPr id="8" name="Rounded Rectangle 7"/>
-          <p:cNvSpPr/>
-          <p:nvPr/>
-        </p:nvSpPr>
-        <p:spPr>
-          <a:xfrm>
-            <a:off x="6263640" y="4206240"/>
-            <a:ext cx="5303520" cy="1234440"/>
+            <a:off x="8129016" y="2606040"/>
+            <a:ext cx="3465576" cy="2834640"/>
           </a:xfrm>
           <a:prstGeom prst="roundRect">
             <a:avLst/>
@@ -12094,7 +11855,7 @@
                 </a:solidFill>
                 <a:latin typeface="Aptos"/>
               </a:rPr>
-              <a:t>WHAT IF AI FAILS?</a:t>
+              <a:t>FAILURE &amp; OPERATIONS</a:t>
             </a:r>
           </a:p>
           <a:p>
@@ -12110,14 +11871,62 @@
                 </a:solidFill>
                 <a:latin typeface="Aptos"/>
               </a:rPr>
-              <a:t>Keep manual work; simplify failed tasks; preserve gates.</a:t>
-            </a:r>
-          </a:p>
-        </p:txBody>
-      </p:sp>
-      <p:sp>
-        <p:nvSpPr>
-          <p:cNvPr id="9" name="Zava logo contrast backing"/>
+              <a:t>Manual route on AI failure</a:t>
+            </a:r>
+          </a:p>
+          <a:p>
+            <a:pPr algn="l">
+              <a:lnSpc>
+                <a:spcPct val="105000"/>
+              </a:lnSpc>
+            </a:pPr>
+            <a:r>
+              <a:rPr sz="2000" b="0" i="0">
+                <a:solidFill>
+                  <a:srgbClr val="F7F2E7"/>
+                </a:solidFill>
+                <a:latin typeface="Aptos"/>
+              </a:rPr>
+              <a:t>Unknown facts hold reviews</a:t>
+            </a:r>
+          </a:p>
+          <a:p>
+            <a:pPr algn="l">
+              <a:lnSpc>
+                <a:spcPct val="105000"/>
+              </a:lnSpc>
+            </a:pPr>
+            <a:r>
+              <a:rPr sz="2000" b="0" i="0">
+                <a:solidFill>
+                  <a:srgbClr val="F7F2E7"/>
+                </a:solidFill>
+                <a:latin typeface="Aptos"/>
+              </a:rPr>
+              <a:t>Audit / cost telemetry</a:t>
+            </a:r>
+          </a:p>
+          <a:p>
+            <a:pPr algn="l">
+              <a:lnSpc>
+                <a:spcPct val="105000"/>
+              </a:lnSpc>
+            </a:pPr>
+            <a:r>
+              <a:rPr sz="2000" b="0" i="0">
+                <a:solidFill>
+                  <a:srgbClr val="F7F2E7"/>
+                </a:solidFill>
+                <a:latin typeface="Aptos"/>
+              </a:rPr>
+              <a:t>Recovery still to prove</a:t>
+            </a:r>
+          </a:p>
+        </p:txBody>
+      </p:sp>
+      <p:sp>
+        <p:nvSpPr>
+          <p:cNvPr id="8" name="Zava logo contrast backing"/>
           <p:cNvSpPr/>
           <p:nvPr/>
         </p:nvSpPr>
@@ -12160,7 +11969,7 @@
       </p:sp>
       <p:pic>
         <p:nvPicPr>
-          <p:cNvPr id="10" name="Zava branding logo" descr="image.png"/>
+          <p:cNvPr id="9" name="Zava branding logo" descr="image.png"/>
           <p:cNvPicPr>
             <a:picLocks noChangeAspect="1"/>
           </p:cNvPicPr>
@@ -12836,7 +12645,7 @@
                 </a:solidFill>
                 <a:latin typeface="Aptos"/>
               </a:rPr>
-              <a:t>APPENDIX C • REVIEW AND PROVENANCE</a:t>
+              <a:t>APPENDIX B • ANSWERS WITH REVERSAL CONDITIONS</a:t>
             </a:r>
           </a:p>
         </p:txBody>
@@ -12870,7 +12679,7 @@
                 </a:solidFill>
                 <a:latin typeface="Aptos Display"/>
               </a:rPr>
-              <a:t>Read the evidence label before reading the claim</a:t>
+              <a:t>Council Q&amp;A: the objections we welcome</a:t>
             </a:r>
           </a:p>
         </p:txBody>
@@ -12904,7 +12713,7 @@
                 </a:solidFill>
                 <a:latin typeface="Aptos"/>
               </a:rPr>
-              <a:t>20  /  ZAVA FORWARD     •     AS AT 11 Oct 2026 • REPOSITORY-ONLY • NO NEW LEGAL CURRENTNESS CHECK</a:t>
+              <a:t>20  /  ZAVA FORWARD     •     ALTERNATIVES, AFFORDABILITY, AUTHORITY • E05/E07/E09/E11</a:t>
             </a:r>
           </a:p>
         </p:txBody>
@@ -12918,7 +12727,7 @@
         <p:spPr>
           <a:xfrm>
             <a:off x="594360" y="2606040"/>
-            <a:ext cx="3465576" cy="2514600"/>
+            <a:ext cx="5349240" cy="1234440"/>
           </a:xfrm>
           <a:prstGeom prst="roundRect">
             <a:avLst/>
@@ -12962,7 +12771,7 @@
                 </a:solidFill>
                 <a:latin typeface="Aptos"/>
               </a:rPr>
-              <a:t>REQUEST / RESEARCH</a:t>
+              <a:t>WHY NOT EXCEL / M365?</a:t>
             </a:r>
           </a:p>
           <a:p>
@@ -12978,39 +12787,7 @@
                 </a:solidFill>
                 <a:latin typeface="Aptos"/>
               </a:rPr>
-              <a:t>Original ambition is not an outcome.</a:t>
-            </a:r>
-          </a:p>
-          <a:p>
-            <a:pPr algn="l">
-              <a:lnSpc>
-                <a:spcPct val="105000"/>
-              </a:lnSpc>
-            </a:pPr>
-            <a:r>
-              <a:rPr sz="2000" b="0" i="0">
-                <a:solidFill>
-                  <a:srgbClr val="F7F2E7"/>
-                </a:solidFill>
-                <a:latin typeface="Aptos"/>
-              </a:rPr>
-              <a:t>Sector patterns are not company facts.</a:t>
-            </a:r>
-          </a:p>
-          <a:p>
-            <a:pPr algn="l">
-              <a:lnSpc>
-                <a:spcPct val="105000"/>
-              </a:lnSpc>
-            </a:pPr>
-            <a:r>
-              <a:rPr sz="2000" b="0" i="0">
-                <a:solidFill>
-                  <a:srgbClr val="F7F2E7"/>
-                </a:solidFill>
-                <a:latin typeface="Aptos"/>
-              </a:rPr>
-              <a:t>Role instruments are not interviews.</a:t>
+              <a:t>Cost equivalent options; control mechanisms must win.</a:t>
             </a:r>
           </a:p>
         </p:txBody>
@@ -13023,8 +12800,8 @@
         </p:nvSpPr>
         <p:spPr>
           <a:xfrm>
-            <a:off x="4361688" y="2606040"/>
-            <a:ext cx="3465576" cy="2514600"/>
+            <a:off x="6263640" y="2606040"/>
+            <a:ext cx="5303520" cy="1234440"/>
           </a:xfrm>
           <a:prstGeom prst="roundRect">
             <a:avLst/>
@@ -13068,7 +12845,7 @@
                 </a:solidFill>
                 <a:latin typeface="Aptos"/>
               </a:rPr>
-              <a:t>EXERCISE / DIRECTION</a:t>
+              <a:t>WHY NOT LAUNCH NOW?</a:t>
             </a:r>
           </a:p>
           <a:p>
@@ -13084,39 +12861,7 @@
                 </a:solidFill>
                 <a:latin typeface="Aptos"/>
               </a:rPr>
-              <a:t>Fictional fixtures are not budgets.</a:t>
-            </a:r>
-          </a:p>
-          <a:p>
-            <a:pPr algn="l">
-              <a:lnSpc>
-                <a:spcPct val="105000"/>
-              </a:lnSpc>
-            </a:pPr>
-            <a:r>
-              <a:rPr sz="2000" b="0" i="0">
-                <a:solidFill>
-                  <a:srgbClr val="183A31"/>
-                </a:solidFill>
-                <a:latin typeface="Aptos"/>
-              </a:rPr>
-              <a:t>Accepted v0.12 is historical.</a:t>
-            </a:r>
-          </a:p>
-          <a:p>
-            <a:pPr algn="l">
-              <a:lnSpc>
-                <a:spcPct val="105000"/>
-              </a:lnSpc>
-            </a:pPr>
-            <a:r>
-              <a:rPr sz="2000" b="0" i="0">
-                <a:solidFill>
-                  <a:srgbClr val="183A31"/>
-                </a:solidFill>
-                <a:latin typeface="Aptos"/>
-              </a:rPr>
-              <a:t>v0.13 is pending fresh review.</a:t>
+              <a:t>Feasibility is not full workflow or human acceptance.</a:t>
             </a:r>
           </a:p>
         </p:txBody>
@@ -13129,8 +12874,82 @@
         </p:nvSpPr>
         <p:spPr>
           <a:xfrm>
-            <a:off x="8129016" y="2606040"/>
-            <a:ext cx="3465576" cy="2514600"/>
+            <a:off x="594360" y="4206240"/>
+            <a:ext cx="5349240" cy="1234440"/>
+          </a:xfrm>
+          <a:prstGeom prst="roundRect">
+            <a:avLst/>
+          </a:prstGeom>
+          <a:solidFill>
+            <a:srgbClr val="D5E2D4"/>
+          </a:solidFill>
+          <a:ln>
+            <a:noFill/>
+          </a:ln>
+        </p:spPr>
+        <p:style>
+          <a:lnRef idx="1">
+            <a:schemeClr val="accent1"/>
+          </a:lnRef>
+          <a:fillRef idx="3">
+            <a:schemeClr val="accent1"/>
+          </a:fillRef>
+          <a:effectRef idx="0">
+            <a:schemeClr val="accent1"/>
+          </a:effectRef>
+          <a:fontRef idx="minor">
+            <a:schemeClr val="lt1"/>
+          </a:fontRef>
+        </p:style>
+        <p:txBody>
+          <a:bodyPr rtlCol="0" anchor="ctr" wrap="square" lIns="201168" rIns="201168" tIns="128016" bIns="128016">
+            <a:noAutofit/>
+          </a:bodyPr>
+          <a:lstStyle/>
+          <a:p>
+            <a:pPr algn="l">
+              <a:lnSpc>
+                <a:spcPct val="105000"/>
+              </a:lnSpc>
+            </a:pPr>
+            <a:r>
+              <a:rPr sz="2000" b="0" i="0">
+                <a:solidFill>
+                  <a:srgbClr val="183A31"/>
+                </a:solidFill>
+                <a:latin typeface="Aptos"/>
+              </a:rPr>
+              <a:t>WHAT BUDGET?</a:t>
+            </a:r>
+          </a:p>
+          <a:p>
+            <a:pPr algn="l">
+              <a:lnSpc>
+                <a:spcPct val="105000"/>
+              </a:lnSpc>
+            </a:pPr>
+            <a:r>
+              <a:rPr sz="2000" b="0" i="0">
+                <a:solidFill>
+                  <a:srgbClr val="183A31"/>
+                </a:solidFill>
+                <a:latin typeface="Aptos"/>
+              </a:rPr>
+              <a:t>New scoped authority needed; prior cap/override is historical.</a:t>
+            </a:r>
+          </a:p>
+        </p:txBody>
+      </p:sp>
+      <p:sp>
+        <p:nvSpPr>
+          <p:cNvPr id="8" name="Rounded Rectangle 7"/>
+          <p:cNvSpPr/>
+          <p:nvPr/>
+        </p:nvSpPr>
+        <p:spPr>
+          <a:xfrm>
+            <a:off x="6263640" y="4206240"/>
+            <a:ext cx="5303520" cy="1234440"/>
           </a:xfrm>
           <a:prstGeom prst="roundRect">
             <a:avLst/>
@@ -13174,7 +12993,7 @@
                 </a:solidFill>
                 <a:latin typeface="Aptos"/>
               </a:rPr>
-              <a:t>PROPOSED / OBSERVED</a:t>
+              <a:t>WHAT IF AI FAILS?</a:t>
             </a:r>
           </a:p>
           <a:p>
@@ -13190,73 +13009,7 @@
                 </a:solidFill>
                 <a:latin typeface="Aptos"/>
               </a:rPr>
-              <a:t>Target topology is not deployed proof.</a:t>
-            </a:r>
-          </a:p>
-          <a:p>
-            <a:pPr algn="l">
-              <a:lnSpc>
-                <a:spcPct val="105000"/>
-              </a:lnSpc>
-            </a:pPr>
-            <a:r>
-              <a:rPr sz="2000" b="0" i="0">
-                <a:solidFill>
-                  <a:srgbClr val="F7F2E7"/>
-                </a:solidFill>
-                <a:latin typeface="Aptos"/>
-              </a:rPr>
-              <a:t>Pinned feasibility is narrow.</a:t>
-            </a:r>
-          </a:p>
-          <a:p>
-            <a:pPr algn="l">
-              <a:lnSpc>
-                <a:spcPct val="105000"/>
-              </a:lnSpc>
-            </a:pPr>
-            <a:r>
-              <a:rPr sz="2000" b="0" i="0">
-                <a:solidFill>
-                  <a:srgbClr val="F7F2E7"/>
-                </a:solidFill>
-                <a:latin typeface="Aptos"/>
-              </a:rPr>
-              <a:t>Benefit and readiness are unproved.</a:t>
-            </a:r>
-          </a:p>
-        </p:txBody>
-      </p:sp>
-      <p:sp>
-        <p:nvSpPr>
-          <p:cNvPr id="8" name="TextBox 7"/>
-          <p:cNvSpPr txBox="1"/>
-          <p:nvPr/>
-        </p:nvSpPr>
-        <p:spPr>
-          <a:xfrm>
-            <a:off x="594360" y="5486400"/>
-            <a:ext cx="10972800" cy="320040"/>
-          </a:xfrm>
-          <a:prstGeom prst="rect">
-            <a:avLst/>
-          </a:prstGeom>
-          <a:noFill/>
-        </p:spPr>
-        <p:txBody>
-          <a:bodyPr wrap="square" lIns="0" rIns="0" tIns="0" bIns="0">
-            <a:spAutoFit/>
-          </a:bodyPr>
-          <a:lstStyle/>
-          <a:p>
-            <a:r>
-              <a:rPr sz="1700" b="0" i="0">
-                <a:solidFill>
-                  <a:srgbClr val="183A31"/>
-                </a:solidFill>
-                <a:latin typeface="Aptos"/>
-              </a:rPr>
-              <a:t>Full source/date/status in notes • New narrative review pending • Timed rehearsal pending</a:t>
+              <a:t>Keep manual work; simplify failed tasks; preserve gates.</a:t>
             </a:r>
           </a:p>
         </p:txBody>
@@ -13337,6 +13090,553 @@
 </file>
 
 <file path=ppt/slides/slide21.xml><?xml version="1.0" encoding="utf-8"?>
+<p:sld xmlns:a="http://schemas.openxmlformats.org/drawingml/2006/main" xmlns:p="http://schemas.openxmlformats.org/presentationml/2006/main" xmlns:r="http://schemas.openxmlformats.org/officeDocument/2006/relationships">
+  <p:cSld>
+    <p:bg>
+      <p:bgPr>
+        <a:solidFill>
+          <a:srgbClr val="F7F2E7"/>
+        </a:solidFill>
+        <a:effectLst/>
+      </p:bgPr>
+    </p:bg>
+    <p:spTree>
+      <p:nvGrpSpPr>
+        <p:cNvPr id="1" name=""/>
+        <p:cNvGrpSpPr/>
+        <p:nvPr/>
+      </p:nvGrpSpPr>
+      <p:grpSpPr/>
+      <p:sp>
+        <p:nvSpPr>
+          <p:cNvPr id="2" name="TextBox 1"/>
+          <p:cNvSpPr txBox="1"/>
+          <p:nvPr/>
+        </p:nvSpPr>
+        <p:spPr>
+          <a:xfrm>
+            <a:off x="594360" y="548640"/>
+            <a:ext cx="10972800" cy="274320"/>
+          </a:xfrm>
+          <a:prstGeom prst="rect">
+            <a:avLst/>
+          </a:prstGeom>
+          <a:noFill/>
+        </p:spPr>
+        <p:txBody>
+          <a:bodyPr wrap="square" lIns="0" rIns="0" tIns="0" bIns="0">
+            <a:spAutoFit/>
+          </a:bodyPr>
+          <a:lstStyle/>
+          <a:p>
+            <a:r>
+              <a:rPr sz="1100" b="1" i="0">
+                <a:solidFill>
+                  <a:srgbClr val="446056"/>
+                </a:solidFill>
+                <a:latin typeface="Aptos"/>
+              </a:rPr>
+              <a:t>APPENDIX C • REVIEW AND PROVENANCE</a:t>
+            </a:r>
+          </a:p>
+        </p:txBody>
+      </p:sp>
+      <p:sp>
+        <p:nvSpPr>
+          <p:cNvPr id="3" name="TextBox 2"/>
+          <p:cNvSpPr txBox="1"/>
+          <p:nvPr/>
+        </p:nvSpPr>
+        <p:spPr>
+          <a:xfrm>
+            <a:off x="594360" y="1115568"/>
+            <a:ext cx="10972800" cy="1143000"/>
+          </a:xfrm>
+          <a:prstGeom prst="rect">
+            <a:avLst/>
+          </a:prstGeom>
+          <a:noFill/>
+        </p:spPr>
+        <p:txBody>
+          <a:bodyPr wrap="square" lIns="0" rIns="0" tIns="0" bIns="0">
+            <a:spAutoFit/>
+          </a:bodyPr>
+          <a:lstStyle/>
+          <a:p>
+            <a:r>
+              <a:rPr sz="3800" b="1" i="0">
+                <a:solidFill>
+                  <a:srgbClr val="183A31"/>
+                </a:solidFill>
+                <a:latin typeface="Aptos Display"/>
+              </a:rPr>
+              <a:t>Read the evidence label before reading the claim</a:t>
+            </a:r>
+          </a:p>
+        </p:txBody>
+      </p:sp>
+      <p:sp>
+        <p:nvSpPr>
+          <p:cNvPr id="4" name="TextBox 3"/>
+          <p:cNvSpPr txBox="1"/>
+          <p:nvPr/>
+        </p:nvSpPr>
+        <p:spPr>
+          <a:xfrm>
+            <a:off x="594360" y="6126480"/>
+            <a:ext cx="10972800" cy="256032"/>
+          </a:xfrm>
+          <a:prstGeom prst="rect">
+            <a:avLst/>
+          </a:prstGeom>
+          <a:noFill/>
+        </p:spPr>
+        <p:txBody>
+          <a:bodyPr wrap="square" lIns="0" rIns="0" tIns="0" bIns="0">
+            <a:spAutoFit/>
+          </a:bodyPr>
+          <a:lstStyle/>
+          <a:p>
+            <a:r>
+              <a:rPr sz="1100" b="0" i="0">
+                <a:solidFill>
+                  <a:srgbClr val="183A31"/>
+                </a:solidFill>
+                <a:latin typeface="Aptos"/>
+              </a:rPr>
+              <a:t>21  /  ZAVA FORWARD     •     AS AT 11 Oct 2026 • REPOSITORY-ONLY • NO NEW LEGAL CURRENTNESS CHECK</a:t>
+            </a:r>
+          </a:p>
+        </p:txBody>
+      </p:sp>
+      <p:sp>
+        <p:nvSpPr>
+          <p:cNvPr id="5" name="Rounded Rectangle 4"/>
+          <p:cNvSpPr/>
+          <p:nvPr/>
+        </p:nvSpPr>
+        <p:spPr>
+          <a:xfrm>
+            <a:off x="594360" y="2606040"/>
+            <a:ext cx="3465576" cy="2514600"/>
+          </a:xfrm>
+          <a:prstGeom prst="roundRect">
+            <a:avLst/>
+          </a:prstGeom>
+          <a:solidFill>
+            <a:srgbClr val="173F35"/>
+          </a:solidFill>
+          <a:ln>
+            <a:noFill/>
+          </a:ln>
+        </p:spPr>
+        <p:style>
+          <a:lnRef idx="1">
+            <a:schemeClr val="accent1"/>
+          </a:lnRef>
+          <a:fillRef idx="3">
+            <a:schemeClr val="accent1"/>
+          </a:fillRef>
+          <a:effectRef idx="0">
+            <a:schemeClr val="accent1"/>
+          </a:effectRef>
+          <a:fontRef idx="minor">
+            <a:schemeClr val="lt1"/>
+          </a:fontRef>
+        </p:style>
+        <p:txBody>
+          <a:bodyPr rtlCol="0" anchor="ctr" wrap="square" lIns="201168" rIns="201168" tIns="128016" bIns="128016">
+            <a:noAutofit/>
+          </a:bodyPr>
+          <a:lstStyle/>
+          <a:p>
+            <a:pPr algn="l">
+              <a:lnSpc>
+                <a:spcPct val="105000"/>
+              </a:lnSpc>
+            </a:pPr>
+            <a:r>
+              <a:rPr sz="2000" b="0" i="0">
+                <a:solidFill>
+                  <a:srgbClr val="F7F2E7"/>
+                </a:solidFill>
+                <a:latin typeface="Aptos"/>
+              </a:rPr>
+              <a:t>REQUEST / RESEARCH</a:t>
+            </a:r>
+          </a:p>
+          <a:p>
+            <a:pPr algn="l">
+              <a:lnSpc>
+                <a:spcPct val="105000"/>
+              </a:lnSpc>
+            </a:pPr>
+            <a:r>
+              <a:rPr sz="2000" b="0" i="0">
+                <a:solidFill>
+                  <a:srgbClr val="F7F2E7"/>
+                </a:solidFill>
+                <a:latin typeface="Aptos"/>
+              </a:rPr>
+              <a:t>Original ambition is not an outcome.</a:t>
+            </a:r>
+          </a:p>
+          <a:p>
+            <a:pPr algn="l">
+              <a:lnSpc>
+                <a:spcPct val="105000"/>
+              </a:lnSpc>
+            </a:pPr>
+            <a:r>
+              <a:rPr sz="2000" b="0" i="0">
+                <a:solidFill>
+                  <a:srgbClr val="F7F2E7"/>
+                </a:solidFill>
+                <a:latin typeface="Aptos"/>
+              </a:rPr>
+              <a:t>Sector patterns are not company facts.</a:t>
+            </a:r>
+          </a:p>
+          <a:p>
+            <a:pPr algn="l">
+              <a:lnSpc>
+                <a:spcPct val="105000"/>
+              </a:lnSpc>
+            </a:pPr>
+            <a:r>
+              <a:rPr sz="2000" b="0" i="0">
+                <a:solidFill>
+                  <a:srgbClr val="F7F2E7"/>
+                </a:solidFill>
+                <a:latin typeface="Aptos"/>
+              </a:rPr>
+              <a:t>Role instruments are not interviews.</a:t>
+            </a:r>
+          </a:p>
+        </p:txBody>
+      </p:sp>
+      <p:sp>
+        <p:nvSpPr>
+          <p:cNvPr id="6" name="Rounded Rectangle 5"/>
+          <p:cNvSpPr/>
+          <p:nvPr/>
+        </p:nvSpPr>
+        <p:spPr>
+          <a:xfrm>
+            <a:off x="4361688" y="2606040"/>
+            <a:ext cx="3465576" cy="2514600"/>
+          </a:xfrm>
+          <a:prstGeom prst="roundRect">
+            <a:avLst/>
+          </a:prstGeom>
+          <a:solidFill>
+            <a:srgbClr val="D5E2D4"/>
+          </a:solidFill>
+          <a:ln>
+            <a:noFill/>
+          </a:ln>
+        </p:spPr>
+        <p:style>
+          <a:lnRef idx="1">
+            <a:schemeClr val="accent1"/>
+          </a:lnRef>
+          <a:fillRef idx="3">
+            <a:schemeClr val="accent1"/>
+          </a:fillRef>
+          <a:effectRef idx="0">
+            <a:schemeClr val="accent1"/>
+          </a:effectRef>
+          <a:fontRef idx="minor">
+            <a:schemeClr val="lt1"/>
+          </a:fontRef>
+        </p:style>
+        <p:txBody>
+          <a:bodyPr rtlCol="0" anchor="ctr" wrap="square" lIns="201168" rIns="201168" tIns="128016" bIns="128016">
+            <a:noAutofit/>
+          </a:bodyPr>
+          <a:lstStyle/>
+          <a:p>
+            <a:pPr algn="l">
+              <a:lnSpc>
+                <a:spcPct val="105000"/>
+              </a:lnSpc>
+            </a:pPr>
+            <a:r>
+              <a:rPr sz="2000" b="0" i="0">
+                <a:solidFill>
+                  <a:srgbClr val="183A31"/>
+                </a:solidFill>
+                <a:latin typeface="Aptos"/>
+              </a:rPr>
+              <a:t>EXERCISE / DIRECTION</a:t>
+            </a:r>
+          </a:p>
+          <a:p>
+            <a:pPr algn="l">
+              <a:lnSpc>
+                <a:spcPct val="105000"/>
+              </a:lnSpc>
+            </a:pPr>
+            <a:r>
+              <a:rPr sz="2000" b="0" i="0">
+                <a:solidFill>
+                  <a:srgbClr val="183A31"/>
+                </a:solidFill>
+                <a:latin typeface="Aptos"/>
+              </a:rPr>
+              <a:t>Fictional fixtures are not budgets.</a:t>
+            </a:r>
+          </a:p>
+          <a:p>
+            <a:pPr algn="l">
+              <a:lnSpc>
+                <a:spcPct val="105000"/>
+              </a:lnSpc>
+            </a:pPr>
+            <a:r>
+              <a:rPr sz="2000" b="0" i="0">
+                <a:solidFill>
+                  <a:srgbClr val="183A31"/>
+                </a:solidFill>
+                <a:latin typeface="Aptos"/>
+              </a:rPr>
+              <a:t>Accepted v0.12 is historical.</a:t>
+            </a:r>
+          </a:p>
+          <a:p>
+            <a:pPr algn="l">
+              <a:lnSpc>
+                <a:spcPct val="105000"/>
+              </a:lnSpc>
+            </a:pPr>
+            <a:r>
+              <a:rPr sz="2000" b="0" i="0">
+                <a:solidFill>
+                  <a:srgbClr val="183A31"/>
+                </a:solidFill>
+                <a:latin typeface="Aptos"/>
+              </a:rPr>
+              <a:t>v0.13 is pending fresh review.</a:t>
+            </a:r>
+          </a:p>
+        </p:txBody>
+      </p:sp>
+      <p:sp>
+        <p:nvSpPr>
+          <p:cNvPr id="7" name="Rounded Rectangle 6"/>
+          <p:cNvSpPr/>
+          <p:nvPr/>
+        </p:nvSpPr>
+        <p:spPr>
+          <a:xfrm>
+            <a:off x="8129016" y="2606040"/>
+            <a:ext cx="3465576" cy="2514600"/>
+          </a:xfrm>
+          <a:prstGeom prst="roundRect">
+            <a:avLst/>
+          </a:prstGeom>
+          <a:solidFill>
+            <a:srgbClr val="173F35"/>
+          </a:solidFill>
+          <a:ln>
+            <a:noFill/>
+          </a:ln>
+        </p:spPr>
+        <p:style>
+          <a:lnRef idx="1">
+            <a:schemeClr val="accent1"/>
+          </a:lnRef>
+          <a:fillRef idx="3">
+            <a:schemeClr val="accent1"/>
+          </a:fillRef>
+          <a:effectRef idx="0">
+            <a:schemeClr val="accent1"/>
+          </a:effectRef>
+          <a:fontRef idx="minor">
+            <a:schemeClr val="lt1"/>
+          </a:fontRef>
+        </p:style>
+        <p:txBody>
+          <a:bodyPr rtlCol="0" anchor="ctr" wrap="square" lIns="201168" rIns="201168" tIns="128016" bIns="128016">
+            <a:noAutofit/>
+          </a:bodyPr>
+          <a:lstStyle/>
+          <a:p>
+            <a:pPr algn="l">
+              <a:lnSpc>
+                <a:spcPct val="105000"/>
+              </a:lnSpc>
+            </a:pPr>
+            <a:r>
+              <a:rPr sz="2000" b="0" i="0">
+                <a:solidFill>
+                  <a:srgbClr val="F7F2E7"/>
+                </a:solidFill>
+                <a:latin typeface="Aptos"/>
+              </a:rPr>
+              <a:t>PROPOSED / OBSERVED</a:t>
+            </a:r>
+          </a:p>
+          <a:p>
+            <a:pPr algn="l">
+              <a:lnSpc>
+                <a:spcPct val="105000"/>
+              </a:lnSpc>
+            </a:pPr>
+            <a:r>
+              <a:rPr sz="2000" b="0" i="0">
+                <a:solidFill>
+                  <a:srgbClr val="F7F2E7"/>
+                </a:solidFill>
+                <a:latin typeface="Aptos"/>
+              </a:rPr>
+              <a:t>Target topology is not deployed proof.</a:t>
+            </a:r>
+          </a:p>
+          <a:p>
+            <a:pPr algn="l">
+              <a:lnSpc>
+                <a:spcPct val="105000"/>
+              </a:lnSpc>
+            </a:pPr>
+            <a:r>
+              <a:rPr sz="2000" b="0" i="0">
+                <a:solidFill>
+                  <a:srgbClr val="F7F2E7"/>
+                </a:solidFill>
+                <a:latin typeface="Aptos"/>
+              </a:rPr>
+              <a:t>Pinned feasibility is narrow.</a:t>
+            </a:r>
+          </a:p>
+          <a:p>
+            <a:pPr algn="l">
+              <a:lnSpc>
+                <a:spcPct val="105000"/>
+              </a:lnSpc>
+            </a:pPr>
+            <a:r>
+              <a:rPr sz="2000" b="0" i="0">
+                <a:solidFill>
+                  <a:srgbClr val="F7F2E7"/>
+                </a:solidFill>
+                <a:latin typeface="Aptos"/>
+              </a:rPr>
+              <a:t>Benefit and readiness are unproved.</a:t>
+            </a:r>
+          </a:p>
+        </p:txBody>
+      </p:sp>
+      <p:sp>
+        <p:nvSpPr>
+          <p:cNvPr id="8" name="TextBox 7"/>
+          <p:cNvSpPr txBox="1"/>
+          <p:nvPr/>
+        </p:nvSpPr>
+        <p:spPr>
+          <a:xfrm>
+            <a:off x="594360" y="5486400"/>
+            <a:ext cx="10972800" cy="320040"/>
+          </a:xfrm>
+          <a:prstGeom prst="rect">
+            <a:avLst/>
+          </a:prstGeom>
+          <a:noFill/>
+        </p:spPr>
+        <p:txBody>
+          <a:bodyPr wrap="square" lIns="0" rIns="0" tIns="0" bIns="0">
+            <a:spAutoFit/>
+          </a:bodyPr>
+          <a:lstStyle/>
+          <a:p>
+            <a:r>
+              <a:rPr sz="1700" b="0" i="0">
+                <a:solidFill>
+                  <a:srgbClr val="183A31"/>
+                </a:solidFill>
+                <a:latin typeface="Aptos"/>
+              </a:rPr>
+              <a:t>Full source/date/status in notes • New narrative review pending • Timed rehearsal pending</a:t>
+            </a:r>
+          </a:p>
+        </p:txBody>
+      </p:sp>
+      <p:sp>
+        <p:nvSpPr>
+          <p:cNvPr id="9" name="Zava logo contrast backing"/>
+          <p:cNvSpPr/>
+          <p:nvPr/>
+        </p:nvSpPr>
+        <p:spPr>
+          <a:xfrm>
+            <a:off x="11231575" y="91440"/>
+            <a:ext cx="777240" cy="271551"/>
+          </a:xfrm>
+          <a:prstGeom prst="rect">
+            <a:avLst/>
+          </a:prstGeom>
+          <a:solidFill>
+            <a:srgbClr val="FFFFFF"/>
+          </a:solidFill>
+          <a:ln>
+            <a:noFill/>
+          </a:ln>
+        </p:spPr>
+        <p:style>
+          <a:lnRef idx="1">
+            <a:schemeClr val="accent1"/>
+          </a:lnRef>
+          <a:fillRef idx="3">
+            <a:schemeClr val="accent1"/>
+          </a:fillRef>
+          <a:effectRef idx="2">
+            <a:schemeClr val="accent1"/>
+          </a:effectRef>
+          <a:fontRef idx="minor">
+            <a:schemeClr val="lt1"/>
+          </a:fontRef>
+        </p:style>
+        <p:txBody>
+          <a:bodyPr rtlCol="0" anchor="ctr"/>
+          <a:lstStyle/>
+          <a:p>
+            <a:pPr algn="ctr"/>
+          </a:p>
+        </p:txBody>
+      </p:sp>
+      <p:pic>
+        <p:nvPicPr>
+          <p:cNvPr id="10" name="Zava branding logo" descr="image.png"/>
+          <p:cNvPicPr>
+            <a:picLocks noChangeAspect="1"/>
+          </p:cNvPicPr>
+          <p:nvPr/>
+        </p:nvPicPr>
+        <p:blipFill>
+          <a:blip r:embed="rId3"/>
+          <a:stretch>
+            <a:fillRect/>
+          </a:stretch>
+        </p:blipFill>
+        <p:spPr>
+          <a:xfrm>
+            <a:off x="11231575" y="91440"/>
+            <a:ext cx="777240" cy="271551"/>
+          </a:xfrm>
+          <a:prstGeom prst="rect">
+            <a:avLst/>
+          </a:prstGeom>
+        </p:spPr>
+      </p:pic>
+    </p:spTree>
+  </p:cSld>
+  <p:clrMapOvr>
+    <a:masterClrMapping/>
+  </p:clrMapOvr>
+</p:sld>
+</file>
+
+<file path=ppt/slides/slide22.xml><?xml version="1.0" encoding="utf-8"?>
 <p:sld xmlns:a="http://schemas.openxmlformats.org/drawingml/2006/main" xmlns:p="http://schemas.openxmlformats.org/presentationml/2006/main" xmlns:r="http://schemas.openxmlformats.org/officeDocument/2006/relationships">
   <p:cSld>
     <p:bg>
@@ -13977,7 +14277,7 @@
                 </a:solidFill>
                 <a:latin typeface="Aptos"/>
               </a:rPr>
-              <a:t>21  /  ZAVA FORWARD     •     QUALITATIVE DESIGN HYPOTHESES • ADR 0001 • OQ-012</a:t>
+              <a:t>22  /  ZAVA FORWARD     •     QUALITATIVE DESIGN HYPOTHESES • ADR 0001 • OQ-012</a:t>
             </a:r>
           </a:p>
         </p:txBody>
